--- a/Методика и практика обучения, разработка методических материалов по сопровождению программного обеспечения/Лаб-1.pptx
+++ b/Методика и практика обучения, разработка методических материалов по сопровождению программного обеспечения/Лаб-1.pptx
@@ -7,7 +7,14 @@
   <p:sldIdLst>
     <p:sldId id="256" r:id="rId2"/>
     <p:sldId id="257" r:id="rId3"/>
-    <p:sldId id="258" r:id="rId4"/>
+    <p:sldId id="259" r:id="rId4"/>
+    <p:sldId id="260" r:id="rId5"/>
+    <p:sldId id="258" r:id="rId6"/>
+    <p:sldId id="261" r:id="rId7"/>
+    <p:sldId id="262" r:id="rId8"/>
+    <p:sldId id="263" r:id="rId9"/>
+    <p:sldId id="264" r:id="rId10"/>
+    <p:sldId id="265" r:id="rId11"/>
   </p:sldIdLst>
   <p:sldSz cx="12192000" cy="6858000"/>
   <p:notesSz cx="6858000" cy="9144000"/>
@@ -106,6 +113,11 @@
       </a:defRPr>
     </a:lvl9pPr>
   </p:defaultTextStyle>
+  <p:extLst>
+    <p:ext uri="{EFAFB233-063F-42B5-8137-9DF3F51BA10A}">
+      <p15:sldGuideLst xmlns:p15="http://schemas.microsoft.com/office/powerpoint/2012/main"/>
+    </p:ext>
+  </p:extLst>
 </p:presentation>
 </file>
 
@@ -1320,7 +1332,7 @@
           <a:p>
             <a:fld id="{D0AC2334-E1D7-4E50-ABDF-0EC0E5DC8EB9}" type="datetimeFigureOut">
               <a:rPr lang="ru-RU" smtClean="0"/>
-              <a:t>13.05.2026</a:t>
+              <a:t>20.05.2026</a:t>
             </a:fld>
             <a:endParaRPr lang="ru-RU"/>
           </a:p>
@@ -1558,7 +1570,7 @@
           <a:p>
             <a:fld id="{D0AC2334-E1D7-4E50-ABDF-0EC0E5DC8EB9}" type="datetimeFigureOut">
               <a:rPr lang="ru-RU" smtClean="0"/>
-              <a:t>13.05.2026</a:t>
+              <a:t>20.05.2026</a:t>
             </a:fld>
             <a:endParaRPr lang="ru-RU"/>
           </a:p>
@@ -1738,7 +1750,7 @@
           <a:p>
             <a:fld id="{D0AC2334-E1D7-4E50-ABDF-0EC0E5DC8EB9}" type="datetimeFigureOut">
               <a:rPr lang="ru-RU" smtClean="0"/>
-              <a:t>13.05.2026</a:t>
+              <a:t>20.05.2026</a:t>
             </a:fld>
             <a:endParaRPr lang="ru-RU"/>
           </a:p>
@@ -1908,7 +1920,7 @@
           <a:p>
             <a:fld id="{D0AC2334-E1D7-4E50-ABDF-0EC0E5DC8EB9}" type="datetimeFigureOut">
               <a:rPr lang="ru-RU" smtClean="0"/>
-              <a:t>13.05.2026</a:t>
+              <a:t>20.05.2026</a:t>
             </a:fld>
             <a:endParaRPr lang="ru-RU"/>
           </a:p>
@@ -2184,7 +2196,7 @@
           <a:p>
             <a:fld id="{D0AC2334-E1D7-4E50-ABDF-0EC0E5DC8EB9}" type="datetimeFigureOut">
               <a:rPr lang="ru-RU" smtClean="0"/>
-              <a:t>13.05.2026</a:t>
+              <a:t>20.05.2026</a:t>
             </a:fld>
             <a:endParaRPr lang="ru-RU"/>
           </a:p>
@@ -3385,7 +3397,7 @@
           <a:p>
             <a:fld id="{D0AC2334-E1D7-4E50-ABDF-0EC0E5DC8EB9}" type="datetimeFigureOut">
               <a:rPr lang="ru-RU" smtClean="0"/>
-              <a:t>13.05.2026</a:t>
+              <a:t>20.05.2026</a:t>
             </a:fld>
             <a:endParaRPr lang="ru-RU"/>
           </a:p>
@@ -3775,7 +3787,7 @@
           <a:p>
             <a:fld id="{D0AC2334-E1D7-4E50-ABDF-0EC0E5DC8EB9}" type="datetimeFigureOut">
               <a:rPr lang="ru-RU" smtClean="0"/>
-              <a:t>13.05.2026</a:t>
+              <a:t>20.05.2026</a:t>
             </a:fld>
             <a:endParaRPr lang="ru-RU"/>
           </a:p>
@@ -3898,7 +3910,7 @@
           <a:p>
             <a:fld id="{D0AC2334-E1D7-4E50-ABDF-0EC0E5DC8EB9}" type="datetimeFigureOut">
               <a:rPr lang="ru-RU" smtClean="0"/>
-              <a:t>13.05.2026</a:t>
+              <a:t>20.05.2026</a:t>
             </a:fld>
             <a:endParaRPr lang="ru-RU"/>
           </a:p>
@@ -3993,7 +4005,7 @@
           <a:p>
             <a:fld id="{D0AC2334-E1D7-4E50-ABDF-0EC0E5DC8EB9}" type="datetimeFigureOut">
               <a:rPr lang="ru-RU" smtClean="0"/>
-              <a:t>13.05.2026</a:t>
+              <a:t>20.05.2026</a:t>
             </a:fld>
             <a:endParaRPr lang="ru-RU"/>
           </a:p>
@@ -4756,7 +4768,7 @@
           <a:p>
             <a:fld id="{D0AC2334-E1D7-4E50-ABDF-0EC0E5DC8EB9}" type="datetimeFigureOut">
               <a:rPr lang="ru-RU" smtClean="0"/>
-              <a:t>13.05.2026</a:t>
+              <a:t>20.05.2026</a:t>
             </a:fld>
             <a:endParaRPr lang="ru-RU"/>
           </a:p>
@@ -5596,7 +5608,7 @@
           <a:p>
             <a:fld id="{D0AC2334-E1D7-4E50-ABDF-0EC0E5DC8EB9}" type="datetimeFigureOut">
               <a:rPr lang="ru-RU" smtClean="0"/>
-              <a:t>13.05.2026</a:t>
+              <a:t>20.05.2026</a:t>
             </a:fld>
             <a:endParaRPr lang="ru-RU"/>
           </a:p>
@@ -5823,7 +5835,7 @@
           <a:p>
             <a:fld id="{D0AC2334-E1D7-4E50-ABDF-0EC0E5DC8EB9}" type="datetimeFigureOut">
               <a:rPr lang="ru-RU" smtClean="0"/>
-              <a:t>13.05.2026</a:t>
+              <a:t>20.05.2026</a:t>
             </a:fld>
             <a:endParaRPr lang="ru-RU"/>
           </a:p>
@@ -6891,7 +6903,7 @@
 </p:sld>
 </file>
 
-<file path=ppt/slides/slide2.xml><?xml version="1.0" encoding="utf-8"?>
+<file path=ppt/slides/slide10.xml><?xml version="1.0" encoding="utf-8"?>
 <p:sld xmlns:a="http://schemas.openxmlformats.org/drawingml/2006/main" xmlns:r="http://schemas.openxmlformats.org/officeDocument/2006/relationships" xmlns:p="http://schemas.openxmlformats.org/presentationml/2006/main">
   <p:cSld>
     <p:spTree>
@@ -6910,10 +6922,10 @@
       </p:grpSpPr>
       <p:sp>
         <p:nvSpPr>
-          <p:cNvPr id="2" name="Рисунок 1">
+          <p:cNvPr id="2" name="Заголовок 1">
             <a:extLst>
               <a:ext uri="{FF2B5EF4-FFF2-40B4-BE49-F238E27FC236}">
-                <a16:creationId xmlns:a16="http://schemas.microsoft.com/office/drawing/2014/main" id="{8A46A065-1185-C693-D670-0F183DB6CD94}"/>
+                <a16:creationId xmlns:a16="http://schemas.microsoft.com/office/drawing/2014/main" id="{2F2E3989-4A3B-E4DD-F7B1-23DD0F5C7F50}"/>
               </a:ext>
             </a:extLst>
           </p:cNvPr>
@@ -6921,11 +6933,118 @@
             <a:spLocks noGrp="1"/>
           </p:cNvSpPr>
           <p:nvPr>
-            <p:ph type="pic" idx="1"/>
+            <p:ph type="ctrTitle"/>
           </p:nvPr>
         </p:nvSpPr>
         <p:spPr/>
+        <p:txBody>
+          <a:bodyPr/>
+          <a:lstStyle/>
+          <a:p>
+            <a:r>
+              <a:rPr lang="ru-RU" b="1" dirty="0"/>
+              <a:t>Спасибо за внимание</a:t>
+            </a:r>
+            <a:endParaRPr lang="ru-RU" dirty="0"/>
+          </a:p>
+        </p:txBody>
       </p:sp>
+      <p:sp>
+        <p:nvSpPr>
+          <p:cNvPr id="3" name="Подзаголовок 2">
+            <a:extLst>
+              <a:ext uri="{FF2B5EF4-FFF2-40B4-BE49-F238E27FC236}">
+                <a16:creationId xmlns:a16="http://schemas.microsoft.com/office/drawing/2014/main" id="{2371229B-BF0E-761F-1FC5-59C785D256FD}"/>
+              </a:ext>
+            </a:extLst>
+          </p:cNvPr>
+          <p:cNvSpPr>
+            <a:spLocks noGrp="1"/>
+          </p:cNvSpPr>
+          <p:nvPr>
+            <p:ph type="subTitle" idx="1"/>
+          </p:nvPr>
+        </p:nvSpPr>
+        <p:spPr/>
+        <p:txBody>
+          <a:bodyPr>
+            <a:normAutofit fontScale="85000" lnSpcReduction="20000"/>
+          </a:bodyPr>
+          <a:lstStyle/>
+          <a:p>
+            <a:r>
+              <a:rPr lang="ru-RU" dirty="0"/>
+              <a:t>Контактная информация:</a:t>
+            </a:r>
+            <a:br>
+              <a:rPr lang="ru-RU" dirty="0"/>
+            </a:br>
+            <a:r>
+              <a:rPr lang="ru-RU" dirty="0" err="1"/>
+              <a:t>Email</a:t>
+            </a:r>
+            <a:r>
+              <a:rPr lang="ru-RU" dirty="0"/>
+              <a:t>: </a:t>
+            </a:r>
+            <a:r>
+              <a:rPr lang="en-US" dirty="0"/>
+              <a:t>Dix1k@yandex.ru</a:t>
+            </a:r>
+            <a:br>
+              <a:rPr lang="ru-RU" dirty="0"/>
+            </a:br>
+            <a:r>
+              <a:rPr lang="ru-RU" dirty="0" err="1"/>
+              <a:t>GitHub</a:t>
+            </a:r>
+            <a:r>
+              <a:rPr lang="ru-RU" dirty="0"/>
+              <a:t>: </a:t>
+            </a:r>
+            <a:r>
+              <a:rPr lang="en-US" dirty="0">
+                <a:hlinkClick r:id="rId2"/>
+              </a:rPr>
+              <a:t>github.com/Dix1k</a:t>
+            </a:r>
+            <a:endParaRPr lang="ru-RU" dirty="0"/>
+          </a:p>
+          <a:p>
+            <a:endParaRPr lang="ru-RU" dirty="0"/>
+          </a:p>
+        </p:txBody>
+      </p:sp>
+    </p:spTree>
+    <p:extLst>
+      <p:ext uri="{BB962C8B-B14F-4D97-AF65-F5344CB8AC3E}">
+        <p14:creationId xmlns:p14="http://schemas.microsoft.com/office/powerpoint/2010/main" val="2756893314"/>
+      </p:ext>
+    </p:extLst>
+  </p:cSld>
+  <p:clrMapOvr>
+    <a:masterClrMapping/>
+  </p:clrMapOvr>
+</p:sld>
+</file>
+
+<file path=ppt/slides/slide2.xml><?xml version="1.0" encoding="utf-8"?>
+<p:sld xmlns:a="http://schemas.openxmlformats.org/drawingml/2006/main" xmlns:r="http://schemas.openxmlformats.org/officeDocument/2006/relationships" xmlns:p="http://schemas.openxmlformats.org/presentationml/2006/main">
+  <p:cSld>
+    <p:spTree>
+      <p:nvGrpSpPr>
+        <p:cNvPr id="1" name=""/>
+        <p:cNvGrpSpPr/>
+        <p:nvPr/>
+      </p:nvGrpSpPr>
+      <p:grpSpPr>
+        <a:xfrm>
+          <a:off x="0" y="0"/>
+          <a:ext cx="0" cy="0"/>
+          <a:chOff x="0" y="0"/>
+          <a:chExt cx="0" cy="0"/>
+        </a:xfrm>
+      </p:grpSpPr>
       <p:sp>
         <p:nvSpPr>
           <p:cNvPr id="3" name="Заголовок 2">
@@ -6973,7 +7092,7 @@
         <p:spPr/>
         <p:txBody>
           <a:bodyPr>
-            <a:normAutofit fontScale="92500"/>
+            <a:normAutofit fontScale="92500" lnSpcReduction="20000"/>
           </a:bodyPr>
           <a:lstStyle/>
           <a:p>
@@ -6989,7 +7108,7 @@
           <a:p>
             <a:r>
               <a:rPr lang="ru-RU" sz="1400" b="1" dirty="0"/>
-              <a:t>Курс:</a:t>
+              <a:t>Студент	Курс:</a:t>
             </a:r>
             <a:r>
               <a:rPr lang="ru-RU" sz="1400" dirty="0"/>
@@ -6999,7 +7118,7 @@
           <a:p>
             <a:r>
               <a:rPr lang="ru-RU" sz="1400" b="1" dirty="0"/>
-              <a:t>Факультет:</a:t>
+              <a:t>Пермский ГАТУ	Факультет:</a:t>
             </a:r>
             <a:r>
               <a:rPr lang="ru-RU" sz="1400" dirty="0"/>
@@ -7024,18 +7143,30 @@
             <a:endParaRPr lang="ru-RU" sz="1400" dirty="0"/>
           </a:p>
           <a:p>
+            <a:pPr marL="285750" indent="-285750">
+              <a:buFont typeface="Arial" panose="020B0604020202020204" pitchFamily="34" charset="0"/>
+              <a:buChar char="•"/>
+            </a:pPr>
             <a:r>
               <a:rPr lang="ru-RU" sz="1400" dirty="0"/>
               <a:t>Разработка программного обеспечения</a:t>
             </a:r>
           </a:p>
           <a:p>
+            <a:pPr marL="285750" indent="-285750">
+              <a:buFont typeface="Arial" panose="020B0604020202020204" pitchFamily="34" charset="0"/>
+              <a:buChar char="•"/>
+            </a:pPr>
             <a:r>
               <a:rPr lang="ru-RU" sz="1400" dirty="0"/>
               <a:t>Сопровождение и тестирование ПО</a:t>
             </a:r>
           </a:p>
           <a:p>
+            <a:pPr marL="285750" indent="-285750">
+              <a:buFont typeface="Arial" panose="020B0604020202020204" pitchFamily="34" charset="0"/>
+              <a:buChar char="•"/>
+            </a:pPr>
             <a:r>
               <a:rPr lang="ru-RU" sz="1400" dirty="0" err="1"/>
               <a:t>DevOps</a:t>
@@ -7086,6 +7217,33 @@
           </a:p>
         </p:txBody>
       </p:sp>
+      <p:pic>
+        <p:nvPicPr>
+          <p:cNvPr id="10" name="Рисунок 9">
+            <a:extLst>
+              <a:ext uri="{FF2B5EF4-FFF2-40B4-BE49-F238E27FC236}">
+                <a16:creationId xmlns:a16="http://schemas.microsoft.com/office/drawing/2014/main" id="{0232AB96-6653-E683-4B51-BB680361C620}"/>
+              </a:ext>
+            </a:extLst>
+          </p:cNvPr>
+          <p:cNvPicPr>
+            <a:picLocks noGrp="1" noChangeAspect="1"/>
+          </p:cNvPicPr>
+          <p:nvPr>
+            <p:ph type="pic" idx="1"/>
+          </p:nvPr>
+        </p:nvPicPr>
+        <p:blipFill>
+          <a:blip r:embed="rId3"/>
+          <a:srcRect t="6652" b="6652"/>
+          <a:stretch/>
+        </p:blipFill>
+        <p:spPr>
+          <a:prstGeom prst="rect">
+            <a:avLst/>
+          </a:prstGeom>
+        </p:spPr>
+      </p:pic>
     </p:spTree>
     <p:extLst>
       <p:ext uri="{BB962C8B-B14F-4D97-AF65-F5344CB8AC3E}">
@@ -7104,6 +7262,366 @@
   <p:cSld>
     <p:spTree>
       <p:nvGrpSpPr>
+        <p:cNvPr id="1" name="">
+          <a:extLst>
+            <a:ext uri="{FF2B5EF4-FFF2-40B4-BE49-F238E27FC236}">
+              <a16:creationId xmlns:a16="http://schemas.microsoft.com/office/drawing/2014/main" id="{EF26C327-664C-2EB1-BA93-1B9700921118}"/>
+            </a:ext>
+          </a:extLst>
+        </p:cNvPr>
+        <p:cNvGrpSpPr/>
+        <p:nvPr/>
+      </p:nvGrpSpPr>
+      <p:grpSpPr>
+        <a:xfrm>
+          <a:off x="0" y="0"/>
+          <a:ext cx="0" cy="0"/>
+          <a:chOff x="0" y="0"/>
+          <a:chExt cx="0" cy="0"/>
+        </a:xfrm>
+      </p:grpSpPr>
+      <p:pic>
+        <p:nvPicPr>
+          <p:cNvPr id="6" name="Рисунок 5">
+            <a:extLst>
+              <a:ext uri="{FF2B5EF4-FFF2-40B4-BE49-F238E27FC236}">
+                <a16:creationId xmlns:a16="http://schemas.microsoft.com/office/drawing/2014/main" id="{647D8278-427E-EB53-7A9C-96A1E399257A}"/>
+              </a:ext>
+            </a:extLst>
+          </p:cNvPr>
+          <p:cNvPicPr>
+            <a:picLocks noGrp="1" noChangeAspect="1"/>
+          </p:cNvPicPr>
+          <p:nvPr>
+            <p:ph type="pic" idx="1"/>
+          </p:nvPr>
+        </p:nvPicPr>
+        <p:blipFill>
+          <a:blip r:embed="rId2"/>
+          <a:srcRect t="3378" b="3378"/>
+          <a:stretch/>
+        </p:blipFill>
+        <p:spPr>
+          <a:prstGeom prst="rect">
+            <a:avLst/>
+          </a:prstGeom>
+        </p:spPr>
+      </p:pic>
+      <p:sp>
+        <p:nvSpPr>
+          <p:cNvPr id="3" name="Заголовок 2">
+            <a:extLst>
+              <a:ext uri="{FF2B5EF4-FFF2-40B4-BE49-F238E27FC236}">
+                <a16:creationId xmlns:a16="http://schemas.microsoft.com/office/drawing/2014/main" id="{165F59EC-A254-BCC7-F745-09C8AE32D5AA}"/>
+              </a:ext>
+            </a:extLst>
+          </p:cNvPr>
+          <p:cNvSpPr>
+            <a:spLocks noGrp="1"/>
+          </p:cNvSpPr>
+          <p:nvPr>
+            <p:ph type="title"/>
+          </p:nvPr>
+        </p:nvSpPr>
+        <p:spPr/>
+        <p:txBody>
+          <a:bodyPr/>
+          <a:lstStyle/>
+          <a:p>
+            <a:r>
+              <a:rPr lang="ru-RU" dirty="0"/>
+              <a:t>Образование и повышение квалификации</a:t>
+            </a:r>
+          </a:p>
+        </p:txBody>
+      </p:sp>
+      <p:sp>
+        <p:nvSpPr>
+          <p:cNvPr id="4" name="Текст 3">
+            <a:extLst>
+              <a:ext uri="{FF2B5EF4-FFF2-40B4-BE49-F238E27FC236}">
+                <a16:creationId xmlns:a16="http://schemas.microsoft.com/office/drawing/2014/main" id="{8E856902-3AD8-3A4A-F4E9-F456D8040B48}"/>
+              </a:ext>
+            </a:extLst>
+          </p:cNvPr>
+          <p:cNvSpPr>
+            <a:spLocks noGrp="1"/>
+          </p:cNvSpPr>
+          <p:nvPr>
+            <p:ph type="body" sz="half" idx="2"/>
+          </p:nvPr>
+        </p:nvSpPr>
+        <p:spPr>
+          <a:xfrm>
+            <a:off x="8337883" y="1741336"/>
+            <a:ext cx="3092117" cy="4903908"/>
+          </a:xfrm>
+        </p:spPr>
+        <p:txBody>
+          <a:bodyPr>
+            <a:normAutofit/>
+          </a:bodyPr>
+          <a:lstStyle/>
+          <a:p>
+            <a:r>
+              <a:rPr lang="ru-RU" b="1" dirty="0"/>
+              <a:t>Базовое образование:</a:t>
+            </a:r>
+            <a:endParaRPr lang="en-US" b="1" dirty="0"/>
+          </a:p>
+          <a:p>
+            <a:pPr marL="285750" indent="-285750">
+              <a:buFont typeface="Arial" panose="020B0604020202020204" pitchFamily="34" charset="0"/>
+              <a:buChar char="•"/>
+            </a:pPr>
+            <a:r>
+              <a:rPr lang="ru-RU" b="1" dirty="0"/>
+              <a:t>Суксунская СОШ №2:</a:t>
+            </a:r>
+          </a:p>
+          <a:p>
+            <a:r>
+              <a:rPr lang="ru-RU" dirty="0"/>
+              <a:t>2012-2023 г.</a:t>
+            </a:r>
+          </a:p>
+          <a:p>
+            <a:pPr marL="285750" indent="-285750">
+              <a:buFont typeface="Arial" panose="020B0604020202020204" pitchFamily="34" charset="0"/>
+              <a:buChar char="•"/>
+            </a:pPr>
+            <a:r>
+              <a:rPr lang="ru-RU" b="1" dirty="0"/>
+              <a:t>Пермский ГАТУ, направление «Программная инженерия», бакалавриат:</a:t>
+            </a:r>
+          </a:p>
+          <a:p>
+            <a:r>
+              <a:rPr lang="ru-RU" dirty="0"/>
+              <a:t>2023-2027 г.</a:t>
+            </a:r>
+          </a:p>
+          <a:p>
+            <a:r>
+              <a:rPr lang="ru-RU" b="1" dirty="0"/>
+              <a:t>Дополнительное образование:</a:t>
+            </a:r>
+            <a:endParaRPr lang="ru-RU" dirty="0"/>
+          </a:p>
+          <a:p>
+            <a:pPr marL="285750" indent="-285750">
+              <a:buFont typeface="Arial" panose="020B0604020202020204" pitchFamily="34" charset="0"/>
+              <a:buChar char="•"/>
+            </a:pPr>
+            <a:r>
+              <a:rPr lang="ru-RU" dirty="0"/>
+              <a:t>2023 год: Курс «</a:t>
+            </a:r>
+            <a:r>
+              <a:rPr lang="en-US" dirty="0"/>
+              <a:t>Python</a:t>
+            </a:r>
+            <a:r>
+              <a:rPr lang="ru-RU" dirty="0"/>
+              <a:t>» от школы «Синергия»</a:t>
+            </a:r>
+          </a:p>
+          <a:p>
+            <a:pPr marL="285750" indent="-285750">
+              <a:buFont typeface="Arial" panose="020B0604020202020204" pitchFamily="34" charset="0"/>
+              <a:buChar char="•"/>
+            </a:pPr>
+            <a:r>
+              <a:rPr lang="ru-RU" dirty="0"/>
+              <a:t>Суксунская ДШИ:	Танцы и Аккордеон</a:t>
+            </a:r>
+          </a:p>
+        </p:txBody>
+      </p:sp>
+    </p:spTree>
+    <p:extLst>
+      <p:ext uri="{BB962C8B-B14F-4D97-AF65-F5344CB8AC3E}">
+        <p14:creationId xmlns:p14="http://schemas.microsoft.com/office/powerpoint/2010/main" val="4214992772"/>
+      </p:ext>
+    </p:extLst>
+  </p:cSld>
+  <p:clrMapOvr>
+    <a:masterClrMapping/>
+  </p:clrMapOvr>
+</p:sld>
+</file>
+
+<file path=ppt/slides/slide4.xml><?xml version="1.0" encoding="utf-8"?>
+<p:sld xmlns:a="http://schemas.openxmlformats.org/drawingml/2006/main" xmlns:r="http://schemas.openxmlformats.org/officeDocument/2006/relationships" xmlns:p="http://schemas.openxmlformats.org/presentationml/2006/main">
+  <p:cSld>
+    <p:spTree>
+      <p:nvGrpSpPr>
+        <p:cNvPr id="1" name="">
+          <a:extLst>
+            <a:ext uri="{FF2B5EF4-FFF2-40B4-BE49-F238E27FC236}">
+              <a16:creationId xmlns:a16="http://schemas.microsoft.com/office/drawing/2014/main" id="{9ED51459-6E54-8D12-8302-2ACC885650EA}"/>
+            </a:ext>
+          </a:extLst>
+        </p:cNvPr>
+        <p:cNvGrpSpPr/>
+        <p:nvPr/>
+      </p:nvGrpSpPr>
+      <p:grpSpPr>
+        <a:xfrm>
+          <a:off x="0" y="0"/>
+          <a:ext cx="0" cy="0"/>
+          <a:chOff x="0" y="0"/>
+          <a:chExt cx="0" cy="0"/>
+        </a:xfrm>
+      </p:grpSpPr>
+      <p:pic>
+        <p:nvPicPr>
+          <p:cNvPr id="6" name="Рисунок 5">
+            <a:extLst>
+              <a:ext uri="{FF2B5EF4-FFF2-40B4-BE49-F238E27FC236}">
+                <a16:creationId xmlns:a16="http://schemas.microsoft.com/office/drawing/2014/main" id="{787F0357-3765-7436-94B1-3CAC0DEFFBC9}"/>
+              </a:ext>
+            </a:extLst>
+          </p:cNvPr>
+          <p:cNvPicPr>
+            <a:picLocks noGrp="1" noChangeAspect="1"/>
+          </p:cNvPicPr>
+          <p:nvPr>
+            <p:ph type="pic" idx="1"/>
+          </p:nvPr>
+        </p:nvPicPr>
+        <p:blipFill>
+          <a:blip r:embed="rId2"/>
+          <a:srcRect l="19837" r="19837"/>
+          <a:stretch/>
+        </p:blipFill>
+        <p:spPr>
+          <a:prstGeom prst="rect">
+            <a:avLst/>
+          </a:prstGeom>
+        </p:spPr>
+      </p:pic>
+      <p:sp>
+        <p:nvSpPr>
+          <p:cNvPr id="3" name="Заголовок 2">
+            <a:extLst>
+              <a:ext uri="{FF2B5EF4-FFF2-40B4-BE49-F238E27FC236}">
+                <a16:creationId xmlns:a16="http://schemas.microsoft.com/office/drawing/2014/main" id="{012D17B6-6C0A-D6D4-50F0-6E714D9706C8}"/>
+              </a:ext>
+            </a:extLst>
+          </p:cNvPr>
+          <p:cNvSpPr>
+            <a:spLocks noGrp="1"/>
+          </p:cNvSpPr>
+          <p:nvPr>
+            <p:ph type="title"/>
+          </p:nvPr>
+        </p:nvSpPr>
+        <p:spPr/>
+        <p:txBody>
+          <a:bodyPr/>
+          <a:lstStyle/>
+          <a:p>
+            <a:r>
+              <a:rPr lang="ru-RU" dirty="0"/>
+              <a:t>Научно-исследовательская деятельность</a:t>
+            </a:r>
+          </a:p>
+        </p:txBody>
+      </p:sp>
+      <p:sp>
+        <p:nvSpPr>
+          <p:cNvPr id="4" name="Текст 3">
+            <a:extLst>
+              <a:ext uri="{FF2B5EF4-FFF2-40B4-BE49-F238E27FC236}">
+                <a16:creationId xmlns:a16="http://schemas.microsoft.com/office/drawing/2014/main" id="{4B32DCC9-8BEE-D2F0-D448-8C85FD842022}"/>
+              </a:ext>
+            </a:extLst>
+          </p:cNvPr>
+          <p:cNvSpPr>
+            <a:spLocks noGrp="1"/>
+          </p:cNvSpPr>
+          <p:nvPr>
+            <p:ph type="body" sz="half" idx="2"/>
+          </p:nvPr>
+        </p:nvSpPr>
+        <p:spPr/>
+        <p:txBody>
+          <a:bodyPr>
+            <a:normAutofit fontScale="77500" lnSpcReduction="20000"/>
+          </a:bodyPr>
+          <a:lstStyle/>
+          <a:p>
+            <a:r>
+              <a:rPr lang="ru-RU" b="1" dirty="0"/>
+              <a:t>Тема исследования:</a:t>
+            </a:r>
+            <a:br>
+              <a:rPr lang="ru-RU" dirty="0"/>
+            </a:br>
+            <a:r>
+              <a:rPr lang="ru-RU" dirty="0"/>
+              <a:t>«Адаптация процесса сопровождения программных средств для учебных проектов»</a:t>
+            </a:r>
+          </a:p>
+          <a:p>
+            <a:r>
+              <a:rPr lang="ru-RU" b="1" dirty="0"/>
+              <a:t>Публикации:</a:t>
+            </a:r>
+            <a:endParaRPr lang="ru-RU" dirty="0"/>
+          </a:p>
+          <a:p>
+            <a:r>
+              <a:rPr lang="ru-RU" dirty="0"/>
+              <a:t>Иванов И.И. Анализ подходов к сопровождению ПО // Студенческий вестник, №3(15), 2025.</a:t>
+            </a:r>
+          </a:p>
+          <a:p>
+            <a:r>
+              <a:rPr lang="ru-RU" dirty="0"/>
+              <a:t>Иванов И.И. Сравнительный анализ CASE-средств для сопровождения // Молодой учёный, №7, 2025 (в печати).</a:t>
+            </a:r>
+          </a:p>
+          <a:p>
+            <a:r>
+              <a:rPr lang="ru-RU" b="1" dirty="0"/>
+              <a:t>Участие в грантах и проектах:</a:t>
+            </a:r>
+            <a:endParaRPr lang="ru-RU" dirty="0"/>
+          </a:p>
+          <a:p>
+            <a:r>
+              <a:rPr lang="ru-RU" dirty="0"/>
+              <a:t>2024–2025: Участие в проекте «Разработка системы тестирования знаний» (роль: тестировщик)</a:t>
+            </a:r>
+          </a:p>
+          <a:p>
+            <a:r>
+              <a:rPr lang="ru-RU" dirty="0"/>
+              <a:t>2025: Победа в конкурсе научных работ кафедры (2 место)</a:t>
+            </a:r>
+          </a:p>
+        </p:txBody>
+      </p:sp>
+    </p:spTree>
+    <p:extLst>
+      <p:ext uri="{BB962C8B-B14F-4D97-AF65-F5344CB8AC3E}">
+        <p14:creationId xmlns:p14="http://schemas.microsoft.com/office/powerpoint/2010/main" val="4293099655"/>
+      </p:ext>
+    </p:extLst>
+  </p:cSld>
+  <p:clrMapOvr>
+    <a:masterClrMapping/>
+  </p:clrMapOvr>
+</p:sld>
+</file>
+
+<file path=ppt/slides/slide5.xml><?xml version="1.0" encoding="utf-8"?>
+<p:sld xmlns:a="http://schemas.openxmlformats.org/drawingml/2006/main" xmlns:r="http://schemas.openxmlformats.org/officeDocument/2006/relationships" xmlns:p="http://schemas.openxmlformats.org/presentationml/2006/main">
+  <p:cSld>
+    <p:spTree>
+      <p:nvGrpSpPr>
         <p:cNvPr id="1" name=""/>
         <p:cNvGrpSpPr/>
         <p:nvPr/>
@@ -7116,10 +7634,1985 @@
           <a:chExt cx="0" cy="0"/>
         </a:xfrm>
       </p:grpSpPr>
+      <p:sp>
+        <p:nvSpPr>
+          <p:cNvPr id="4" name="TextBox 3">
+            <a:extLst>
+              <a:ext uri="{FF2B5EF4-FFF2-40B4-BE49-F238E27FC236}">
+                <a16:creationId xmlns:a16="http://schemas.microsoft.com/office/drawing/2014/main" id="{1A03BAC6-488D-F2E9-A19E-B080702CB12C}"/>
+              </a:ext>
+            </a:extLst>
+          </p:cNvPr>
+          <p:cNvSpPr txBox="1"/>
+          <p:nvPr/>
+        </p:nvSpPr>
+        <p:spPr>
+          <a:xfrm>
+            <a:off x="2552385" y="0"/>
+            <a:ext cx="7087229" cy="584775"/>
+          </a:xfrm>
+          <a:prstGeom prst="rect">
+            <a:avLst/>
+          </a:prstGeom>
+          <a:noFill/>
+        </p:spPr>
+        <p:txBody>
+          <a:bodyPr wrap="square">
+            <a:spAutoFit/>
+          </a:bodyPr>
+          <a:lstStyle/>
+          <a:p>
+            <a:r>
+              <a:rPr lang="ru-RU" sz="3200" b="1" dirty="0"/>
+              <a:t>Практические навыки и компетенции</a:t>
+            </a:r>
+          </a:p>
+        </p:txBody>
+      </p:sp>
+      <p:graphicFrame>
+        <p:nvGraphicFramePr>
+          <p:cNvPr id="6" name="Таблица 5">
+            <a:extLst>
+              <a:ext uri="{FF2B5EF4-FFF2-40B4-BE49-F238E27FC236}">
+                <a16:creationId xmlns:a16="http://schemas.microsoft.com/office/drawing/2014/main" id="{7F0CC78C-D63C-DF60-F078-007CA55520BF}"/>
+              </a:ext>
+            </a:extLst>
+          </p:cNvPr>
+          <p:cNvGraphicFramePr>
+            <a:graphicFrameLocks noGrp="1"/>
+          </p:cNvGraphicFramePr>
+          <p:nvPr>
+            <p:extLst>
+              <p:ext uri="{D42A27DB-BD31-4B8C-83A1-F6EECF244321}">
+                <p14:modId xmlns:p14="http://schemas.microsoft.com/office/powerpoint/2010/main" val="1780551132"/>
+              </p:ext>
+            </p:extLst>
+          </p:nvPr>
+        </p:nvGraphicFramePr>
+        <p:xfrm>
+          <a:off x="2032000" y="1379682"/>
+          <a:ext cx="8128000" cy="1854200"/>
+        </p:xfrm>
+        <a:graphic>
+          <a:graphicData uri="http://schemas.openxmlformats.org/drawingml/2006/table">
+            <a:tbl>
+              <a:tblPr firstRow="1" bandRow="1">
+                <a:tableStyleId>{5C22544A-7EE6-4342-B048-85BDC9FD1C3A}</a:tableStyleId>
+              </a:tblPr>
+              <a:tblGrid>
+                <a:gridCol w="4064000">
+                  <a:extLst>
+                    <a:ext uri="{9D8B030D-6E8A-4147-A177-3AD203B41FA5}">
+                      <a16:colId xmlns:a16="http://schemas.microsoft.com/office/drawing/2014/main" val="3682180582"/>
+                    </a:ext>
+                  </a:extLst>
+                </a:gridCol>
+                <a:gridCol w="4064000">
+                  <a:extLst>
+                    <a:ext uri="{9D8B030D-6E8A-4147-A177-3AD203B41FA5}">
+                      <a16:colId xmlns:a16="http://schemas.microsoft.com/office/drawing/2014/main" val="1865801847"/>
+                    </a:ext>
+                  </a:extLst>
+                </a:gridCol>
+              </a:tblGrid>
+              <a:tr h="370840">
+                <a:tc gridSpan="2">
+                  <a:txBody>
+                    <a:bodyPr/>
+                    <a:lstStyle/>
+                    <a:p>
+                      <a:r>
+                        <a:rPr lang="ru-RU" dirty="0"/>
+                        <a:t>Технические навыки</a:t>
+                      </a:r>
+                    </a:p>
+                  </a:txBody>
+                  <a:tcPr/>
+                </a:tc>
+                <a:tc hMerge="1">
+                  <a:txBody>
+                    <a:bodyPr/>
+                    <a:lstStyle/>
+                    <a:p>
+                      <a:endParaRPr lang="ru-RU" dirty="0"/>
+                    </a:p>
+                  </a:txBody>
+                  <a:tcPr/>
+                </a:tc>
+                <a:extLst>
+                  <a:ext uri="{0D108BD9-81ED-4DB2-BD59-A6C34878D82A}">
+                    <a16:rowId xmlns:a16="http://schemas.microsoft.com/office/drawing/2014/main" val="1869912331"/>
+                  </a:ext>
+                </a:extLst>
+              </a:tr>
+              <a:tr h="370840">
+                <a:tc>
+                  <a:txBody>
+                    <a:bodyPr/>
+                    <a:lstStyle/>
+                    <a:p>
+                      <a:r>
+                        <a:rPr lang="ru-RU" sz="1800" b="0" i="0" kern="1200" dirty="0">
+                          <a:solidFill>
+                            <a:schemeClr val="dk1"/>
+                          </a:solidFill>
+                          <a:effectLst/>
+                          <a:latin typeface="+mn-lt"/>
+                          <a:ea typeface="+mn-ea"/>
+                          <a:cs typeface="+mn-cs"/>
+                        </a:rPr>
+                        <a:t>Языки программирования</a:t>
+                      </a:r>
+                      <a:endParaRPr lang="ru-RU" dirty="0"/>
+                    </a:p>
+                  </a:txBody>
+                  <a:tcPr/>
+                </a:tc>
+                <a:tc>
+                  <a:txBody>
+                    <a:bodyPr/>
+                    <a:lstStyle/>
+                    <a:p>
+                      <a:r>
+                        <a:rPr lang="en-US" sz="1800" b="0" i="0" kern="1200" dirty="0">
+                          <a:solidFill>
+                            <a:schemeClr val="dk1"/>
+                          </a:solidFill>
+                          <a:effectLst/>
+                          <a:latin typeface="+mn-lt"/>
+                          <a:ea typeface="+mn-ea"/>
+                          <a:cs typeface="+mn-cs"/>
+                        </a:rPr>
+                        <a:t>Python, Java, C#, C++ (</a:t>
+                      </a:r>
+                      <a:r>
+                        <a:rPr lang="ru-RU" sz="1800" b="0" i="0" kern="1200" dirty="0">
+                          <a:solidFill>
+                            <a:schemeClr val="dk1"/>
+                          </a:solidFill>
+                          <a:effectLst/>
+                          <a:latin typeface="+mn-lt"/>
+                          <a:ea typeface="+mn-ea"/>
+                          <a:cs typeface="+mn-cs"/>
+                        </a:rPr>
+                        <a:t>базовый)</a:t>
+                      </a:r>
+                      <a:endParaRPr lang="ru-RU" dirty="0"/>
+                    </a:p>
+                  </a:txBody>
+                  <a:tcPr/>
+                </a:tc>
+                <a:extLst>
+                  <a:ext uri="{0D108BD9-81ED-4DB2-BD59-A6C34878D82A}">
+                    <a16:rowId xmlns:a16="http://schemas.microsoft.com/office/drawing/2014/main" val="1832025507"/>
+                  </a:ext>
+                </a:extLst>
+              </a:tr>
+              <a:tr h="370840">
+                <a:tc>
+                  <a:txBody>
+                    <a:bodyPr/>
+                    <a:lstStyle/>
+                    <a:p>
+                      <a:r>
+                        <a:rPr lang="ru-RU" sz="1800" b="0" i="0" kern="1200" dirty="0">
+                          <a:solidFill>
+                            <a:schemeClr val="dk1"/>
+                          </a:solidFill>
+                          <a:effectLst/>
+                          <a:latin typeface="+mn-lt"/>
+                          <a:ea typeface="+mn-ea"/>
+                          <a:cs typeface="+mn-cs"/>
+                        </a:rPr>
+                        <a:t>Инструменты</a:t>
+                      </a:r>
+                      <a:endParaRPr lang="ru-RU" dirty="0"/>
+                    </a:p>
+                  </a:txBody>
+                  <a:tcPr/>
+                </a:tc>
+                <a:tc>
+                  <a:txBody>
+                    <a:bodyPr/>
+                    <a:lstStyle/>
+                    <a:p>
+                      <a:r>
+                        <a:rPr lang="en-US" sz="1800" b="0" i="0" kern="1200" dirty="0">
+                          <a:solidFill>
+                            <a:schemeClr val="dk1"/>
+                          </a:solidFill>
+                          <a:effectLst/>
+                          <a:latin typeface="+mn-lt"/>
+                          <a:ea typeface="+mn-ea"/>
+                          <a:cs typeface="+mn-cs"/>
+                        </a:rPr>
+                        <a:t>Git, GitHub, Visual Studio, VS Code</a:t>
+                      </a:r>
+                      <a:endParaRPr lang="ru-RU" dirty="0"/>
+                    </a:p>
+                  </a:txBody>
+                  <a:tcPr/>
+                </a:tc>
+                <a:extLst>
+                  <a:ext uri="{0D108BD9-81ED-4DB2-BD59-A6C34878D82A}">
+                    <a16:rowId xmlns:a16="http://schemas.microsoft.com/office/drawing/2014/main" val="1697542634"/>
+                  </a:ext>
+                </a:extLst>
+              </a:tr>
+              <a:tr h="370840">
+                <a:tc>
+                  <a:txBody>
+                    <a:bodyPr/>
+                    <a:lstStyle/>
+                    <a:p>
+                      <a:r>
+                        <a:rPr lang="ru-RU" sz="1800" b="0" i="0" kern="1200" dirty="0">
+                          <a:solidFill>
+                            <a:schemeClr val="dk1"/>
+                          </a:solidFill>
+                          <a:effectLst/>
+                          <a:latin typeface="+mn-lt"/>
+                          <a:ea typeface="+mn-ea"/>
+                          <a:cs typeface="+mn-cs"/>
+                        </a:rPr>
+                        <a:t>Тестирование</a:t>
+                      </a:r>
+                      <a:endParaRPr lang="ru-RU" dirty="0"/>
+                    </a:p>
+                  </a:txBody>
+                  <a:tcPr/>
+                </a:tc>
+                <a:tc>
+                  <a:txBody>
+                    <a:bodyPr/>
+                    <a:lstStyle/>
+                    <a:p>
+                      <a:r>
+                        <a:rPr lang="en-US" sz="1800" b="0" i="0" kern="1200" dirty="0" err="1">
+                          <a:solidFill>
+                            <a:schemeClr val="dk1"/>
+                          </a:solidFill>
+                          <a:effectLst/>
+                          <a:latin typeface="+mn-lt"/>
+                          <a:ea typeface="+mn-ea"/>
+                          <a:cs typeface="+mn-cs"/>
+                        </a:rPr>
+                        <a:t>Pytest</a:t>
+                      </a:r>
+                      <a:r>
+                        <a:rPr lang="en-US" sz="1800" b="0" i="0" kern="1200" dirty="0">
+                          <a:solidFill>
+                            <a:schemeClr val="dk1"/>
+                          </a:solidFill>
+                          <a:effectLst/>
+                          <a:latin typeface="+mn-lt"/>
+                          <a:ea typeface="+mn-ea"/>
+                          <a:cs typeface="+mn-cs"/>
+                        </a:rPr>
+                        <a:t>, JUnit, </a:t>
+                      </a:r>
+                      <a:r>
+                        <a:rPr lang="ru-RU" sz="1800" b="0" i="0" kern="1200" dirty="0">
+                          <a:solidFill>
+                            <a:schemeClr val="dk1"/>
+                          </a:solidFill>
+                          <a:effectLst/>
+                          <a:latin typeface="+mn-lt"/>
+                          <a:ea typeface="+mn-ea"/>
+                          <a:cs typeface="+mn-cs"/>
+                        </a:rPr>
+                        <a:t>ручное тестирование</a:t>
+                      </a:r>
+                      <a:endParaRPr lang="ru-RU" dirty="0"/>
+                    </a:p>
+                  </a:txBody>
+                  <a:tcPr/>
+                </a:tc>
+                <a:extLst>
+                  <a:ext uri="{0D108BD9-81ED-4DB2-BD59-A6C34878D82A}">
+                    <a16:rowId xmlns:a16="http://schemas.microsoft.com/office/drawing/2014/main" val="798348031"/>
+                  </a:ext>
+                </a:extLst>
+              </a:tr>
+              <a:tr h="370840">
+                <a:tc>
+                  <a:txBody>
+                    <a:bodyPr/>
+                    <a:lstStyle/>
+                    <a:p>
+                      <a:r>
+                        <a:rPr lang="ru-RU" sz="1800" b="0" i="0" kern="1200" dirty="0">
+                          <a:solidFill>
+                            <a:schemeClr val="dk1"/>
+                          </a:solidFill>
+                          <a:effectLst/>
+                          <a:latin typeface="+mn-lt"/>
+                          <a:ea typeface="+mn-ea"/>
+                          <a:cs typeface="+mn-cs"/>
+                        </a:rPr>
+                        <a:t>Базы данных</a:t>
+                      </a:r>
+                      <a:endParaRPr lang="ru-RU" dirty="0"/>
+                    </a:p>
+                  </a:txBody>
+                  <a:tcPr/>
+                </a:tc>
+                <a:tc>
+                  <a:txBody>
+                    <a:bodyPr/>
+                    <a:lstStyle/>
+                    <a:p>
+                      <a:r>
+                        <a:rPr lang="en-US" sz="1800" b="0" i="0" kern="1200" dirty="0">
+                          <a:solidFill>
+                            <a:schemeClr val="dk1"/>
+                          </a:solidFill>
+                          <a:effectLst/>
+                          <a:latin typeface="+mn-lt"/>
+                          <a:ea typeface="+mn-ea"/>
+                          <a:cs typeface="+mn-cs"/>
+                        </a:rPr>
+                        <a:t>SQLite, PostgreSQL (</a:t>
+                      </a:r>
+                      <a:r>
+                        <a:rPr lang="ru-RU" sz="1800" b="0" i="0" kern="1200" dirty="0">
+                          <a:solidFill>
+                            <a:schemeClr val="dk1"/>
+                          </a:solidFill>
+                          <a:effectLst/>
+                          <a:latin typeface="+mn-lt"/>
+                          <a:ea typeface="+mn-ea"/>
+                          <a:cs typeface="+mn-cs"/>
+                        </a:rPr>
+                        <a:t>начальный)</a:t>
+                      </a:r>
+                      <a:endParaRPr lang="ru-RU" dirty="0"/>
+                    </a:p>
+                  </a:txBody>
+                  <a:tcPr/>
+                </a:tc>
+                <a:extLst>
+                  <a:ext uri="{0D108BD9-81ED-4DB2-BD59-A6C34878D82A}">
+                    <a16:rowId xmlns:a16="http://schemas.microsoft.com/office/drawing/2014/main" val="2102129031"/>
+                  </a:ext>
+                </a:extLst>
+              </a:tr>
+            </a:tbl>
+          </a:graphicData>
+        </a:graphic>
+      </p:graphicFrame>
+      <p:sp>
+        <p:nvSpPr>
+          <p:cNvPr id="8" name="TextBox 7">
+            <a:extLst>
+              <a:ext uri="{FF2B5EF4-FFF2-40B4-BE49-F238E27FC236}">
+                <a16:creationId xmlns:a16="http://schemas.microsoft.com/office/drawing/2014/main" id="{FE634FF6-FD80-B311-91E8-BE67430844BF}"/>
+              </a:ext>
+            </a:extLst>
+          </p:cNvPr>
+          <p:cNvSpPr txBox="1"/>
+          <p:nvPr/>
+        </p:nvSpPr>
+        <p:spPr>
+          <a:xfrm>
+            <a:off x="2032000" y="4028790"/>
+            <a:ext cx="8548735" cy="1477328"/>
+          </a:xfrm>
+          <a:prstGeom prst="rect">
+            <a:avLst/>
+          </a:prstGeom>
+          <a:noFill/>
+        </p:spPr>
+        <p:txBody>
+          <a:bodyPr wrap="square">
+            <a:spAutoFit/>
+          </a:bodyPr>
+          <a:lstStyle/>
+          <a:p>
+            <a:r>
+              <a:rPr lang="ru-RU" b="1" dirty="0"/>
+              <a:t>Soft </a:t>
+            </a:r>
+            <a:r>
+              <a:rPr lang="ru-RU" b="1" dirty="0" err="1"/>
+              <a:t>skills</a:t>
+            </a:r>
+            <a:r>
+              <a:rPr lang="ru-RU" dirty="0"/>
+              <a:t>:</a:t>
+            </a:r>
+          </a:p>
+          <a:p>
+            <a:pPr marL="285750" indent="-285750">
+              <a:buFont typeface="Arial" panose="020B0604020202020204" pitchFamily="34" charset="0"/>
+              <a:buChar char="•"/>
+            </a:pPr>
+            <a:r>
+              <a:rPr lang="ru-RU" dirty="0"/>
+              <a:t>Работа в команде</a:t>
+            </a:r>
+          </a:p>
+          <a:p>
+            <a:pPr marL="285750" indent="-285750">
+              <a:buFont typeface="Arial" panose="020B0604020202020204" pitchFamily="34" charset="0"/>
+              <a:buChar char="•"/>
+            </a:pPr>
+            <a:r>
+              <a:rPr lang="ru-RU" dirty="0"/>
+              <a:t>Аналитическое мышление</a:t>
+            </a:r>
+          </a:p>
+          <a:p>
+            <a:pPr marL="285750" indent="-285750">
+              <a:buFont typeface="Arial" panose="020B0604020202020204" pitchFamily="34" charset="0"/>
+              <a:buChar char="•"/>
+            </a:pPr>
+            <a:r>
+              <a:rPr lang="ru-RU" dirty="0"/>
+              <a:t>Навыки документации (ГОСТ 19.XXX)</a:t>
+            </a:r>
+          </a:p>
+          <a:p>
+            <a:pPr marL="285750" indent="-285750">
+              <a:buFont typeface="Arial" panose="020B0604020202020204" pitchFamily="34" charset="0"/>
+              <a:buChar char="•"/>
+            </a:pPr>
+            <a:r>
+              <a:rPr lang="ru-RU" dirty="0"/>
+              <a:t>Обратная связь</a:t>
+            </a:r>
+          </a:p>
+        </p:txBody>
+      </p:sp>
     </p:spTree>
     <p:extLst>
       <p:ext uri="{BB962C8B-B14F-4D97-AF65-F5344CB8AC3E}">
         <p14:creationId xmlns:p14="http://schemas.microsoft.com/office/powerpoint/2010/main" val="263623431"/>
+      </p:ext>
+    </p:extLst>
+  </p:cSld>
+  <p:clrMapOvr>
+    <a:masterClrMapping/>
+  </p:clrMapOvr>
+</p:sld>
+</file>
+
+<file path=ppt/slides/slide6.xml><?xml version="1.0" encoding="utf-8"?>
+<p:sld xmlns:a="http://schemas.openxmlformats.org/drawingml/2006/main" xmlns:r="http://schemas.openxmlformats.org/officeDocument/2006/relationships" xmlns:p="http://schemas.openxmlformats.org/presentationml/2006/main">
+  <p:cSld>
+    <p:spTree>
+      <p:nvGrpSpPr>
+        <p:cNvPr id="1" name="">
+          <a:extLst>
+            <a:ext uri="{FF2B5EF4-FFF2-40B4-BE49-F238E27FC236}">
+              <a16:creationId xmlns:a16="http://schemas.microsoft.com/office/drawing/2014/main" id="{0795145A-E313-32EE-D679-E9848B812EA6}"/>
+            </a:ext>
+          </a:extLst>
+        </p:cNvPr>
+        <p:cNvGrpSpPr/>
+        <p:nvPr/>
+      </p:nvGrpSpPr>
+      <p:grpSpPr>
+        <a:xfrm>
+          <a:off x="0" y="0"/>
+          <a:ext cx="0" cy="0"/>
+          <a:chOff x="0" y="0"/>
+          <a:chExt cx="0" cy="0"/>
+        </a:xfrm>
+      </p:grpSpPr>
+      <p:sp>
+        <p:nvSpPr>
+          <p:cNvPr id="4" name="TextBox 3">
+            <a:extLst>
+              <a:ext uri="{FF2B5EF4-FFF2-40B4-BE49-F238E27FC236}">
+                <a16:creationId xmlns:a16="http://schemas.microsoft.com/office/drawing/2014/main" id="{04134CE8-8E57-2789-E5DB-A3549869BC58}"/>
+              </a:ext>
+            </a:extLst>
+          </p:cNvPr>
+          <p:cNvSpPr txBox="1"/>
+          <p:nvPr/>
+        </p:nvSpPr>
+        <p:spPr>
+          <a:xfrm>
+            <a:off x="2552385" y="126749"/>
+            <a:ext cx="7087229" cy="861774"/>
+          </a:xfrm>
+          <a:prstGeom prst="rect">
+            <a:avLst/>
+          </a:prstGeom>
+          <a:noFill/>
+        </p:spPr>
+        <p:txBody>
+          <a:bodyPr wrap="square">
+            <a:spAutoFit/>
+          </a:bodyPr>
+          <a:lstStyle/>
+          <a:p>
+            <a:r>
+              <a:rPr lang="ru-RU" sz="3200" b="1" dirty="0"/>
+              <a:t>Самоанализ и перспективы развития</a:t>
+            </a:r>
+            <a:br>
+              <a:rPr lang="en-US" sz="3200" b="1" dirty="0"/>
+            </a:br>
+            <a:r>
+              <a:rPr lang="ru-RU" b="1" dirty="0"/>
+              <a:t>Анализ по П. Эштону (измерение эффективности)</a:t>
+            </a:r>
+          </a:p>
+        </p:txBody>
+      </p:sp>
+      <p:graphicFrame>
+        <p:nvGraphicFramePr>
+          <p:cNvPr id="2" name="Таблица 1">
+            <a:extLst>
+              <a:ext uri="{FF2B5EF4-FFF2-40B4-BE49-F238E27FC236}">
+                <a16:creationId xmlns:a16="http://schemas.microsoft.com/office/drawing/2014/main" id="{5B070747-CE7B-B438-F9FF-AC2B68266F55}"/>
+              </a:ext>
+            </a:extLst>
+          </p:cNvPr>
+          <p:cNvGraphicFramePr>
+            <a:graphicFrameLocks noGrp="1"/>
+          </p:cNvGraphicFramePr>
+          <p:nvPr>
+            <p:extLst>
+              <p:ext uri="{D42A27DB-BD31-4B8C-83A1-F6EECF244321}">
+                <p14:modId xmlns:p14="http://schemas.microsoft.com/office/powerpoint/2010/main" val="4107491068"/>
+              </p:ext>
+            </p:extLst>
+          </p:nvPr>
+        </p:nvGraphicFramePr>
+        <p:xfrm>
+          <a:off x="2031999" y="2068632"/>
+          <a:ext cx="8127999" cy="3571240"/>
+        </p:xfrm>
+        <a:graphic>
+          <a:graphicData uri="http://schemas.openxmlformats.org/drawingml/2006/table">
+            <a:tbl>
+              <a:tblPr firstRow="1" bandRow="1">
+                <a:tableStyleId>{5C22544A-7EE6-4342-B048-85BDC9FD1C3A}</a:tableStyleId>
+              </a:tblPr>
+              <a:tblGrid>
+                <a:gridCol w="2709333">
+                  <a:extLst>
+                    <a:ext uri="{9D8B030D-6E8A-4147-A177-3AD203B41FA5}">
+                      <a16:colId xmlns:a16="http://schemas.microsoft.com/office/drawing/2014/main" val="419956756"/>
+                    </a:ext>
+                  </a:extLst>
+                </a:gridCol>
+                <a:gridCol w="2709333">
+                  <a:extLst>
+                    <a:ext uri="{9D8B030D-6E8A-4147-A177-3AD203B41FA5}">
+                      <a16:colId xmlns:a16="http://schemas.microsoft.com/office/drawing/2014/main" val="1518581328"/>
+                    </a:ext>
+                  </a:extLst>
+                </a:gridCol>
+                <a:gridCol w="2709333">
+                  <a:extLst>
+                    <a:ext uri="{9D8B030D-6E8A-4147-A177-3AD203B41FA5}">
+                      <a16:colId xmlns:a16="http://schemas.microsoft.com/office/drawing/2014/main" val="707905112"/>
+                    </a:ext>
+                  </a:extLst>
+                </a:gridCol>
+              </a:tblGrid>
+              <a:tr h="370840">
+                <a:tc>
+                  <a:txBody>
+                    <a:bodyPr/>
+                    <a:lstStyle/>
+                    <a:p>
+                      <a:r>
+                        <a:rPr lang="ru-RU" dirty="0"/>
+                        <a:t>Критерий</a:t>
+                      </a:r>
+                    </a:p>
+                  </a:txBody>
+                  <a:tcPr/>
+                </a:tc>
+                <a:tc>
+                  <a:txBody>
+                    <a:bodyPr/>
+                    <a:lstStyle/>
+                    <a:p>
+                      <a:r>
+                        <a:rPr lang="ru-RU" dirty="0"/>
+                        <a:t>Самооценка (1-5)</a:t>
+                      </a:r>
+                    </a:p>
+                  </a:txBody>
+                  <a:tcPr/>
+                </a:tc>
+                <a:tc>
+                  <a:txBody>
+                    <a:bodyPr/>
+                    <a:lstStyle/>
+                    <a:p>
+                      <a:r>
+                        <a:rPr lang="ru-RU" dirty="0"/>
+                        <a:t>Пояснение</a:t>
+                      </a:r>
+                    </a:p>
+                  </a:txBody>
+                  <a:tcPr/>
+                </a:tc>
+                <a:extLst>
+                  <a:ext uri="{0D108BD9-81ED-4DB2-BD59-A6C34878D82A}">
+                    <a16:rowId xmlns:a16="http://schemas.microsoft.com/office/drawing/2014/main" val="1798546813"/>
+                  </a:ext>
+                </a:extLst>
+              </a:tr>
+              <a:tr h="370840">
+                <a:tc>
+                  <a:txBody>
+                    <a:bodyPr/>
+                    <a:lstStyle/>
+                    <a:p>
+                      <a:r>
+                        <a:rPr lang="ru-RU" dirty="0"/>
+                        <a:t>Продуктивность</a:t>
+                      </a:r>
+                    </a:p>
+                  </a:txBody>
+                  <a:tcPr/>
+                </a:tc>
+                <a:tc>
+                  <a:txBody>
+                    <a:bodyPr/>
+                    <a:lstStyle/>
+                    <a:p>
+                      <a:r>
+                        <a:rPr lang="ru-RU" dirty="0"/>
+                        <a:t>5</a:t>
+                      </a:r>
+                    </a:p>
+                  </a:txBody>
+                  <a:tcPr/>
+                </a:tc>
+                <a:tc>
+                  <a:txBody>
+                    <a:bodyPr/>
+                    <a:lstStyle/>
+                    <a:p>
+                      <a:r>
+                        <a:rPr lang="ru-RU" sz="1800" b="0" i="0" kern="1200" dirty="0">
+                          <a:solidFill>
+                            <a:schemeClr val="dk1"/>
+                          </a:solidFill>
+                          <a:effectLst/>
+                          <a:latin typeface="+mn-lt"/>
+                          <a:ea typeface="+mn-ea"/>
+                          <a:cs typeface="+mn-cs"/>
+                        </a:rPr>
+                        <a:t>Выполняю лабораторные в срок</a:t>
+                      </a:r>
+                      <a:endParaRPr lang="ru-RU" dirty="0"/>
+                    </a:p>
+                  </a:txBody>
+                  <a:tcPr/>
+                </a:tc>
+                <a:extLst>
+                  <a:ext uri="{0D108BD9-81ED-4DB2-BD59-A6C34878D82A}">
+                    <a16:rowId xmlns:a16="http://schemas.microsoft.com/office/drawing/2014/main" val="2813422726"/>
+                  </a:ext>
+                </a:extLst>
+              </a:tr>
+              <a:tr h="370840">
+                <a:tc>
+                  <a:txBody>
+                    <a:bodyPr/>
+                    <a:lstStyle/>
+                    <a:p>
+                      <a:r>
+                        <a:rPr lang="ru-RU" dirty="0"/>
+                        <a:t>Качество выполнения</a:t>
+                      </a:r>
+                    </a:p>
+                  </a:txBody>
+                  <a:tcPr/>
+                </a:tc>
+                <a:tc>
+                  <a:txBody>
+                    <a:bodyPr/>
+                    <a:lstStyle/>
+                    <a:p>
+                      <a:r>
+                        <a:rPr lang="ru-RU" dirty="0"/>
+                        <a:t>4</a:t>
+                      </a:r>
+                    </a:p>
+                  </a:txBody>
+                  <a:tcPr/>
+                </a:tc>
+                <a:tc>
+                  <a:txBody>
+                    <a:bodyPr/>
+                    <a:lstStyle/>
+                    <a:p>
+                      <a:r>
+                        <a:rPr lang="ru-RU" sz="1800" b="0" i="0" kern="1200" dirty="0">
+                          <a:solidFill>
+                            <a:schemeClr val="dk1"/>
+                          </a:solidFill>
+                          <a:effectLst/>
+                          <a:latin typeface="+mn-lt"/>
+                          <a:ea typeface="+mn-ea"/>
+                          <a:cs typeface="+mn-cs"/>
+                        </a:rPr>
+                        <a:t>Работы сдаю с первого раза на 85%</a:t>
+                      </a:r>
+                      <a:endParaRPr lang="ru-RU" dirty="0"/>
+                    </a:p>
+                  </a:txBody>
+                  <a:tcPr/>
+                </a:tc>
+                <a:extLst>
+                  <a:ext uri="{0D108BD9-81ED-4DB2-BD59-A6C34878D82A}">
+                    <a16:rowId xmlns:a16="http://schemas.microsoft.com/office/drawing/2014/main" val="2059576496"/>
+                  </a:ext>
+                </a:extLst>
+              </a:tr>
+              <a:tr h="370840">
+                <a:tc>
+                  <a:txBody>
+                    <a:bodyPr/>
+                    <a:lstStyle/>
+                    <a:p>
+                      <a:r>
+                        <a:rPr lang="ru-RU" dirty="0"/>
+                        <a:t>Скорость обучения</a:t>
+                      </a:r>
+                    </a:p>
+                  </a:txBody>
+                  <a:tcPr/>
+                </a:tc>
+                <a:tc>
+                  <a:txBody>
+                    <a:bodyPr/>
+                    <a:lstStyle/>
+                    <a:p>
+                      <a:r>
+                        <a:rPr lang="ru-RU" dirty="0"/>
+                        <a:t>5</a:t>
+                      </a:r>
+                    </a:p>
+                  </a:txBody>
+                  <a:tcPr/>
+                </a:tc>
+                <a:tc>
+                  <a:txBody>
+                    <a:bodyPr/>
+                    <a:lstStyle/>
+                    <a:p>
+                      <a:r>
+                        <a:rPr lang="ru-RU" sz="1800" b="0" i="0" kern="1200" dirty="0">
+                          <a:solidFill>
+                            <a:schemeClr val="dk1"/>
+                          </a:solidFill>
+                          <a:effectLst/>
+                          <a:latin typeface="+mn-lt"/>
+                          <a:ea typeface="+mn-ea"/>
+                          <a:cs typeface="+mn-cs"/>
+                        </a:rPr>
+                        <a:t>Быстро осваиваю новые технологии</a:t>
+                      </a:r>
+                      <a:endParaRPr lang="ru-RU" dirty="0"/>
+                    </a:p>
+                  </a:txBody>
+                  <a:tcPr/>
+                </a:tc>
+                <a:extLst>
+                  <a:ext uri="{0D108BD9-81ED-4DB2-BD59-A6C34878D82A}">
+                    <a16:rowId xmlns:a16="http://schemas.microsoft.com/office/drawing/2014/main" val="2540317525"/>
+                  </a:ext>
+                </a:extLst>
+              </a:tr>
+              <a:tr h="370840">
+                <a:tc>
+                  <a:txBody>
+                    <a:bodyPr/>
+                    <a:lstStyle/>
+                    <a:p>
+                      <a:r>
+                        <a:rPr lang="ru-RU" dirty="0"/>
+                        <a:t>Влияние на команду</a:t>
+                      </a:r>
+                    </a:p>
+                  </a:txBody>
+                  <a:tcPr/>
+                </a:tc>
+                <a:tc>
+                  <a:txBody>
+                    <a:bodyPr/>
+                    <a:lstStyle/>
+                    <a:p>
+                      <a:r>
+                        <a:rPr lang="ru-RU" dirty="0"/>
+                        <a:t>3</a:t>
+                      </a:r>
+                    </a:p>
+                  </a:txBody>
+                  <a:tcPr/>
+                </a:tc>
+                <a:tc>
+                  <a:txBody>
+                    <a:bodyPr/>
+                    <a:lstStyle/>
+                    <a:p>
+                      <a:r>
+                        <a:rPr lang="ru-RU" dirty="0"/>
+                        <a:t>Бывают сложности с объяснением материала</a:t>
+                      </a:r>
+                    </a:p>
+                  </a:txBody>
+                  <a:tcPr/>
+                </a:tc>
+                <a:extLst>
+                  <a:ext uri="{0D108BD9-81ED-4DB2-BD59-A6C34878D82A}">
+                    <a16:rowId xmlns:a16="http://schemas.microsoft.com/office/drawing/2014/main" val="795959069"/>
+                  </a:ext>
+                </a:extLst>
+              </a:tr>
+              <a:tr h="370840">
+                <a:tc>
+                  <a:txBody>
+                    <a:bodyPr/>
+                    <a:lstStyle/>
+                    <a:p>
+                      <a:r>
+                        <a:rPr lang="ru-RU" dirty="0"/>
+                        <a:t>Самоорганизация</a:t>
+                      </a:r>
+                    </a:p>
+                  </a:txBody>
+                  <a:tcPr/>
+                </a:tc>
+                <a:tc>
+                  <a:txBody>
+                    <a:bodyPr/>
+                    <a:lstStyle/>
+                    <a:p>
+                      <a:r>
+                        <a:rPr lang="ru-RU" dirty="0"/>
+                        <a:t>4</a:t>
+                      </a:r>
+                    </a:p>
+                  </a:txBody>
+                  <a:tcPr/>
+                </a:tc>
+                <a:tc>
+                  <a:txBody>
+                    <a:bodyPr/>
+                    <a:lstStyle/>
+                    <a:p>
+                      <a:r>
+                        <a:rPr lang="ru-RU" dirty="0"/>
+                        <a:t>Хорошо организую себя, но не на отлично</a:t>
+                      </a:r>
+                    </a:p>
+                  </a:txBody>
+                  <a:tcPr/>
+                </a:tc>
+                <a:extLst>
+                  <a:ext uri="{0D108BD9-81ED-4DB2-BD59-A6C34878D82A}">
+                    <a16:rowId xmlns:a16="http://schemas.microsoft.com/office/drawing/2014/main" val="4041177068"/>
+                  </a:ext>
+                </a:extLst>
+              </a:tr>
+            </a:tbl>
+          </a:graphicData>
+        </a:graphic>
+      </p:graphicFrame>
+      <p:sp>
+        <p:nvSpPr>
+          <p:cNvPr id="5" name="TextBox 4">
+            <a:extLst>
+              <a:ext uri="{FF2B5EF4-FFF2-40B4-BE49-F238E27FC236}">
+                <a16:creationId xmlns:a16="http://schemas.microsoft.com/office/drawing/2014/main" id="{F11D8A37-A6E7-051B-5469-A17C1104FAF2}"/>
+              </a:ext>
+            </a:extLst>
+          </p:cNvPr>
+          <p:cNvSpPr txBox="1"/>
+          <p:nvPr/>
+        </p:nvSpPr>
+        <p:spPr>
+          <a:xfrm>
+            <a:off x="2031999" y="5878459"/>
+            <a:ext cx="6097508" cy="646331"/>
+          </a:xfrm>
+          <a:prstGeom prst="rect">
+            <a:avLst/>
+          </a:prstGeom>
+          <a:noFill/>
+        </p:spPr>
+        <p:txBody>
+          <a:bodyPr wrap="square">
+            <a:spAutoFit/>
+          </a:bodyPr>
+          <a:lstStyle/>
+          <a:p>
+            <a:r>
+              <a:rPr lang="ru-RU" b="1" dirty="0"/>
+              <a:t>Итоговая оценка по Эштону</a:t>
+            </a:r>
+            <a:r>
+              <a:rPr lang="ru-RU" dirty="0"/>
+              <a:t>: 4.2 (выше среднего)</a:t>
+            </a:r>
+          </a:p>
+          <a:p>
+            <a:endParaRPr lang="ru-RU" dirty="0"/>
+          </a:p>
+        </p:txBody>
+      </p:sp>
+    </p:spTree>
+    <p:extLst>
+      <p:ext uri="{BB962C8B-B14F-4D97-AF65-F5344CB8AC3E}">
+        <p14:creationId xmlns:p14="http://schemas.microsoft.com/office/powerpoint/2010/main" val="692313228"/>
+      </p:ext>
+    </p:extLst>
+  </p:cSld>
+  <p:clrMapOvr>
+    <a:masterClrMapping/>
+  </p:clrMapOvr>
+</p:sld>
+</file>
+
+<file path=ppt/slides/slide7.xml><?xml version="1.0" encoding="utf-8"?>
+<p:sld xmlns:a="http://schemas.openxmlformats.org/drawingml/2006/main" xmlns:r="http://schemas.openxmlformats.org/officeDocument/2006/relationships" xmlns:p="http://schemas.openxmlformats.org/presentationml/2006/main">
+  <p:cSld>
+    <p:spTree>
+      <p:nvGrpSpPr>
+        <p:cNvPr id="1" name="">
+          <a:extLst>
+            <a:ext uri="{FF2B5EF4-FFF2-40B4-BE49-F238E27FC236}">
+              <a16:creationId xmlns:a16="http://schemas.microsoft.com/office/drawing/2014/main" id="{F4C6FB41-9A31-5B25-25BE-BF1086967FE3}"/>
+            </a:ext>
+          </a:extLst>
+        </p:cNvPr>
+        <p:cNvGrpSpPr/>
+        <p:nvPr/>
+      </p:nvGrpSpPr>
+      <p:grpSpPr>
+        <a:xfrm>
+          <a:off x="0" y="0"/>
+          <a:ext cx="0" cy="0"/>
+          <a:chOff x="0" y="0"/>
+          <a:chExt cx="0" cy="0"/>
+        </a:xfrm>
+      </p:grpSpPr>
+      <p:sp>
+        <p:nvSpPr>
+          <p:cNvPr id="4" name="TextBox 3">
+            <a:extLst>
+              <a:ext uri="{FF2B5EF4-FFF2-40B4-BE49-F238E27FC236}">
+                <a16:creationId xmlns:a16="http://schemas.microsoft.com/office/drawing/2014/main" id="{D8178681-E99F-071B-F702-170EC13290A7}"/>
+              </a:ext>
+            </a:extLst>
+          </p:cNvPr>
+          <p:cNvSpPr txBox="1"/>
+          <p:nvPr/>
+        </p:nvSpPr>
+        <p:spPr>
+          <a:xfrm>
+            <a:off x="2552385" y="148544"/>
+            <a:ext cx="7087229" cy="369332"/>
+          </a:xfrm>
+          <a:prstGeom prst="rect">
+            <a:avLst/>
+          </a:prstGeom>
+          <a:noFill/>
+        </p:spPr>
+        <p:txBody>
+          <a:bodyPr wrap="square">
+            <a:spAutoFit/>
+          </a:bodyPr>
+          <a:lstStyle/>
+          <a:p>
+            <a:r>
+              <a:rPr lang="ru-RU" b="1" dirty="0"/>
+              <a:t>Анализ по К. Фельдману (характеристики эффективности)</a:t>
+            </a:r>
+          </a:p>
+        </p:txBody>
+      </p:sp>
+      <p:sp>
+        <p:nvSpPr>
+          <p:cNvPr id="5" name="TextBox 4">
+            <a:extLst>
+              <a:ext uri="{FF2B5EF4-FFF2-40B4-BE49-F238E27FC236}">
+                <a16:creationId xmlns:a16="http://schemas.microsoft.com/office/drawing/2014/main" id="{54680471-00A7-391A-5169-6D74E3336A20}"/>
+              </a:ext>
+            </a:extLst>
+          </p:cNvPr>
+          <p:cNvSpPr txBox="1"/>
+          <p:nvPr/>
+        </p:nvSpPr>
+        <p:spPr>
+          <a:xfrm>
+            <a:off x="2031998" y="5878459"/>
+            <a:ext cx="8777839" cy="646331"/>
+          </a:xfrm>
+          <a:prstGeom prst="rect">
+            <a:avLst/>
+          </a:prstGeom>
+          <a:noFill/>
+        </p:spPr>
+        <p:txBody>
+          <a:bodyPr wrap="square">
+            <a:spAutoFit/>
+          </a:bodyPr>
+          <a:lstStyle/>
+          <a:p>
+            <a:r>
+              <a:rPr lang="ru-RU" b="1" dirty="0"/>
+              <a:t>Вывод по Фельдману:</a:t>
+            </a:r>
+            <a:r>
+              <a:rPr lang="ru-RU" dirty="0"/>
+              <a:t> Высокая мотивация поддерживается разнообразием задач и понятными целями, требуется развивать автономность.</a:t>
+            </a:r>
+          </a:p>
+        </p:txBody>
+      </p:sp>
+      <p:graphicFrame>
+        <p:nvGraphicFramePr>
+          <p:cNvPr id="3" name="Таблица 2">
+            <a:extLst>
+              <a:ext uri="{FF2B5EF4-FFF2-40B4-BE49-F238E27FC236}">
+                <a16:creationId xmlns:a16="http://schemas.microsoft.com/office/drawing/2014/main" id="{A4411DC5-6E72-9867-9939-8C6241C19E72}"/>
+              </a:ext>
+            </a:extLst>
+          </p:cNvPr>
+          <p:cNvGraphicFramePr>
+            <a:graphicFrameLocks noGrp="1"/>
+          </p:cNvGraphicFramePr>
+          <p:nvPr>
+            <p:extLst>
+              <p:ext uri="{D42A27DB-BD31-4B8C-83A1-F6EECF244321}">
+                <p14:modId xmlns:p14="http://schemas.microsoft.com/office/powerpoint/2010/main" val="1630298870"/>
+              </p:ext>
+            </p:extLst>
+          </p:nvPr>
+        </p:nvGraphicFramePr>
+        <p:xfrm>
+          <a:off x="1358020" y="564779"/>
+          <a:ext cx="9995025" cy="5034280"/>
+        </p:xfrm>
+        <a:graphic>
+          <a:graphicData uri="http://schemas.openxmlformats.org/drawingml/2006/table">
+            <a:tbl>
+              <a:tblPr firstRow="1" bandRow="1">
+                <a:tableStyleId>{5C22544A-7EE6-4342-B048-85BDC9FD1C3A}</a:tableStyleId>
+              </a:tblPr>
+              <a:tblGrid>
+                <a:gridCol w="3331675">
+                  <a:extLst>
+                    <a:ext uri="{9D8B030D-6E8A-4147-A177-3AD203B41FA5}">
+                      <a16:colId xmlns:a16="http://schemas.microsoft.com/office/drawing/2014/main" val="957196213"/>
+                    </a:ext>
+                  </a:extLst>
+                </a:gridCol>
+                <a:gridCol w="3331675">
+                  <a:extLst>
+                    <a:ext uri="{9D8B030D-6E8A-4147-A177-3AD203B41FA5}">
+                      <a16:colId xmlns:a16="http://schemas.microsoft.com/office/drawing/2014/main" val="1286423823"/>
+                    </a:ext>
+                  </a:extLst>
+                </a:gridCol>
+                <a:gridCol w="3331675">
+                  <a:extLst>
+                    <a:ext uri="{9D8B030D-6E8A-4147-A177-3AD203B41FA5}">
+                      <a16:colId xmlns:a16="http://schemas.microsoft.com/office/drawing/2014/main" val="1257391353"/>
+                    </a:ext>
+                  </a:extLst>
+                </a:gridCol>
+              </a:tblGrid>
+              <a:tr h="370840">
+                <a:tc>
+                  <a:txBody>
+                    <a:bodyPr/>
+                    <a:lstStyle/>
+                    <a:p>
+                      <a:r>
+                        <a:rPr lang="ru-RU" dirty="0"/>
+                        <a:t>Характеристика</a:t>
+                      </a:r>
+                    </a:p>
+                  </a:txBody>
+                  <a:tcPr/>
+                </a:tc>
+                <a:tc>
+                  <a:txBody>
+                    <a:bodyPr/>
+                    <a:lstStyle/>
+                    <a:p>
+                      <a:r>
+                        <a:rPr lang="ru-RU" dirty="0"/>
+                        <a:t>Оценка</a:t>
+                      </a:r>
+                    </a:p>
+                  </a:txBody>
+                  <a:tcPr/>
+                </a:tc>
+                <a:tc>
+                  <a:txBody>
+                    <a:bodyPr/>
+                    <a:lstStyle/>
+                    <a:p>
+                      <a:r>
+                        <a:rPr lang="ru-RU" dirty="0"/>
+                        <a:t>Комментарий</a:t>
+                      </a:r>
+                    </a:p>
+                  </a:txBody>
+                  <a:tcPr/>
+                </a:tc>
+                <a:extLst>
+                  <a:ext uri="{0D108BD9-81ED-4DB2-BD59-A6C34878D82A}">
+                    <a16:rowId xmlns:a16="http://schemas.microsoft.com/office/drawing/2014/main" val="243998349"/>
+                  </a:ext>
+                </a:extLst>
+              </a:tr>
+              <a:tr h="370840">
+                <a:tc>
+                  <a:txBody>
+                    <a:bodyPr/>
+                    <a:lstStyle/>
+                    <a:p>
+                      <a:r>
+                        <a:rPr lang="ru-RU" sz="1800" b="0" i="0" kern="1200" dirty="0">
+                          <a:solidFill>
+                            <a:schemeClr val="dk1"/>
+                          </a:solidFill>
+                          <a:effectLst/>
+                          <a:latin typeface="+mn-lt"/>
+                          <a:ea typeface="+mn-ea"/>
+                          <a:cs typeface="+mn-cs"/>
+                        </a:rPr>
+                        <a:t>Ясность целей</a:t>
+                      </a:r>
+                      <a:endParaRPr lang="ru-RU" dirty="0"/>
+                    </a:p>
+                  </a:txBody>
+                  <a:tcPr/>
+                </a:tc>
+                <a:tc>
+                  <a:txBody>
+                    <a:bodyPr/>
+                    <a:lstStyle/>
+                    <a:p>
+                      <a:r>
+                        <a:rPr lang="ru-RU" dirty="0"/>
+                        <a:t>5</a:t>
+                      </a:r>
+                    </a:p>
+                  </a:txBody>
+                  <a:tcPr/>
+                </a:tc>
+                <a:tc>
+                  <a:txBody>
+                    <a:bodyPr/>
+                    <a:lstStyle/>
+                    <a:p>
+                      <a:r>
+                        <a:rPr lang="ru-RU" sz="1800" b="0" i="0" kern="1200" dirty="0">
+                          <a:solidFill>
+                            <a:schemeClr val="dk1"/>
+                          </a:solidFill>
+                          <a:effectLst/>
+                          <a:latin typeface="+mn-lt"/>
+                          <a:ea typeface="+mn-ea"/>
+                          <a:cs typeface="+mn-cs"/>
+                        </a:rPr>
+                        <a:t>Понимаю, что нужно сделать в каждой работе</a:t>
+                      </a:r>
+                      <a:endParaRPr lang="ru-RU" dirty="0"/>
+                    </a:p>
+                  </a:txBody>
+                  <a:tcPr/>
+                </a:tc>
+                <a:extLst>
+                  <a:ext uri="{0D108BD9-81ED-4DB2-BD59-A6C34878D82A}">
+                    <a16:rowId xmlns:a16="http://schemas.microsoft.com/office/drawing/2014/main" val="52854361"/>
+                  </a:ext>
+                </a:extLst>
+              </a:tr>
+              <a:tr h="370840">
+                <a:tc>
+                  <a:txBody>
+                    <a:bodyPr/>
+                    <a:lstStyle/>
+                    <a:p>
+                      <a:r>
+                        <a:rPr lang="ru-RU" sz="1800" b="0" i="0" kern="1200" dirty="0">
+                          <a:solidFill>
+                            <a:schemeClr val="dk1"/>
+                          </a:solidFill>
+                          <a:effectLst/>
+                          <a:latin typeface="+mn-lt"/>
+                          <a:ea typeface="+mn-ea"/>
+                          <a:cs typeface="+mn-cs"/>
+                        </a:rPr>
+                        <a:t>Наличие обратной связи</a:t>
+                      </a:r>
+                      <a:endParaRPr lang="ru-RU" dirty="0"/>
+                    </a:p>
+                  </a:txBody>
+                  <a:tcPr/>
+                </a:tc>
+                <a:tc>
+                  <a:txBody>
+                    <a:bodyPr/>
+                    <a:lstStyle/>
+                    <a:p>
+                      <a:r>
+                        <a:rPr lang="ru-RU" dirty="0"/>
+                        <a:t>4</a:t>
+                      </a:r>
+                    </a:p>
+                  </a:txBody>
+                  <a:tcPr/>
+                </a:tc>
+                <a:tc>
+                  <a:txBody>
+                    <a:bodyPr/>
+                    <a:lstStyle/>
+                    <a:p>
+                      <a:r>
+                        <a:rPr lang="ru-RU" sz="1800" b="0" i="0" kern="1200" dirty="0">
+                          <a:solidFill>
+                            <a:schemeClr val="dk1"/>
+                          </a:solidFill>
+                          <a:effectLst/>
+                          <a:latin typeface="+mn-lt"/>
+                          <a:ea typeface="+mn-ea"/>
+                          <a:cs typeface="+mn-cs"/>
+                        </a:rPr>
+                        <a:t>Преподаватель даёт комментарии, но не всегда оперативно</a:t>
+                      </a:r>
+                      <a:endParaRPr lang="ru-RU" dirty="0"/>
+                    </a:p>
+                  </a:txBody>
+                  <a:tcPr/>
+                </a:tc>
+                <a:extLst>
+                  <a:ext uri="{0D108BD9-81ED-4DB2-BD59-A6C34878D82A}">
+                    <a16:rowId xmlns:a16="http://schemas.microsoft.com/office/drawing/2014/main" val="1992158309"/>
+                  </a:ext>
+                </a:extLst>
+              </a:tr>
+              <a:tr h="370840">
+                <a:tc>
+                  <a:txBody>
+                    <a:bodyPr/>
+                    <a:lstStyle/>
+                    <a:p>
+                      <a:r>
+                        <a:rPr lang="ru-RU" sz="1800" b="0" i="0" kern="1200" dirty="0">
+                          <a:solidFill>
+                            <a:schemeClr val="dk1"/>
+                          </a:solidFill>
+                          <a:effectLst/>
+                          <a:latin typeface="+mn-lt"/>
+                          <a:ea typeface="+mn-ea"/>
+                          <a:cs typeface="+mn-cs"/>
+                        </a:rPr>
+                        <a:t>Сложность задач</a:t>
+                      </a:r>
+                      <a:endParaRPr lang="ru-RU" dirty="0"/>
+                    </a:p>
+                  </a:txBody>
+                  <a:tcPr/>
+                </a:tc>
+                <a:tc>
+                  <a:txBody>
+                    <a:bodyPr/>
+                    <a:lstStyle/>
+                    <a:p>
+                      <a:r>
+                        <a:rPr lang="ru-RU" dirty="0"/>
+                        <a:t>4</a:t>
+                      </a:r>
+                    </a:p>
+                  </a:txBody>
+                  <a:tcPr/>
+                </a:tc>
+                <a:tc>
+                  <a:txBody>
+                    <a:bodyPr/>
+                    <a:lstStyle/>
+                    <a:p>
+                      <a:r>
+                        <a:rPr lang="ru-RU" sz="1800" b="0" i="0" kern="1200" dirty="0">
+                          <a:solidFill>
+                            <a:schemeClr val="dk1"/>
+                          </a:solidFill>
+                          <a:effectLst/>
+                          <a:latin typeface="+mn-lt"/>
+                          <a:ea typeface="+mn-ea"/>
+                          <a:cs typeface="+mn-cs"/>
+                        </a:rPr>
+                        <a:t>Задачи адекватны уровню, иногда требуют дополнительного изучения</a:t>
+                      </a:r>
+                      <a:endParaRPr lang="ru-RU" dirty="0"/>
+                    </a:p>
+                  </a:txBody>
+                  <a:tcPr/>
+                </a:tc>
+                <a:extLst>
+                  <a:ext uri="{0D108BD9-81ED-4DB2-BD59-A6C34878D82A}">
+                    <a16:rowId xmlns:a16="http://schemas.microsoft.com/office/drawing/2014/main" val="1194507618"/>
+                  </a:ext>
+                </a:extLst>
+              </a:tr>
+              <a:tr h="370840">
+                <a:tc>
+                  <a:txBody>
+                    <a:bodyPr/>
+                    <a:lstStyle/>
+                    <a:p>
+                      <a:r>
+                        <a:rPr lang="ru-RU" sz="1800" b="0" i="0" kern="1200" dirty="0">
+                          <a:solidFill>
+                            <a:schemeClr val="dk1"/>
+                          </a:solidFill>
+                          <a:effectLst/>
+                          <a:latin typeface="+mn-lt"/>
+                          <a:ea typeface="+mn-ea"/>
+                          <a:cs typeface="+mn-cs"/>
+                        </a:rPr>
+                        <a:t>Автономность</a:t>
+                      </a:r>
+                      <a:endParaRPr lang="ru-RU" dirty="0"/>
+                    </a:p>
+                  </a:txBody>
+                  <a:tcPr/>
+                </a:tc>
+                <a:tc>
+                  <a:txBody>
+                    <a:bodyPr/>
+                    <a:lstStyle/>
+                    <a:p>
+                      <a:r>
+                        <a:rPr lang="ru-RU" dirty="0"/>
+                        <a:t>3</a:t>
+                      </a:r>
+                    </a:p>
+                  </a:txBody>
+                  <a:tcPr/>
+                </a:tc>
+                <a:tc>
+                  <a:txBody>
+                    <a:bodyPr/>
+                    <a:lstStyle/>
+                    <a:p>
+                      <a:r>
+                        <a:rPr lang="ru-RU" sz="1800" b="0" i="0" kern="1200" dirty="0">
+                          <a:solidFill>
+                            <a:schemeClr val="dk1"/>
+                          </a:solidFill>
+                          <a:effectLst/>
+                          <a:latin typeface="+mn-lt"/>
+                          <a:ea typeface="+mn-ea"/>
+                          <a:cs typeface="+mn-cs"/>
+                        </a:rPr>
+                        <a:t>Частично завишу от готовых шаблонов</a:t>
+                      </a:r>
+                      <a:endParaRPr lang="ru-RU" dirty="0"/>
+                    </a:p>
+                  </a:txBody>
+                  <a:tcPr/>
+                </a:tc>
+                <a:extLst>
+                  <a:ext uri="{0D108BD9-81ED-4DB2-BD59-A6C34878D82A}">
+                    <a16:rowId xmlns:a16="http://schemas.microsoft.com/office/drawing/2014/main" val="2370103862"/>
+                  </a:ext>
+                </a:extLst>
+              </a:tr>
+              <a:tr h="370840">
+                <a:tc>
+                  <a:txBody>
+                    <a:bodyPr/>
+                    <a:lstStyle/>
+                    <a:p>
+                      <a:r>
+                        <a:rPr lang="ru-RU" sz="1800" b="0" i="0" kern="1200" dirty="0">
+                          <a:solidFill>
+                            <a:schemeClr val="dk1"/>
+                          </a:solidFill>
+                          <a:effectLst/>
+                          <a:latin typeface="+mn-lt"/>
+                          <a:ea typeface="+mn-ea"/>
+                          <a:cs typeface="+mn-cs"/>
+                        </a:rPr>
+                        <a:t>Разнообразие</a:t>
+                      </a:r>
+                      <a:endParaRPr lang="ru-RU" dirty="0"/>
+                    </a:p>
+                  </a:txBody>
+                  <a:tcPr/>
+                </a:tc>
+                <a:tc>
+                  <a:txBody>
+                    <a:bodyPr/>
+                    <a:lstStyle/>
+                    <a:p>
+                      <a:r>
+                        <a:rPr lang="ru-RU" dirty="0"/>
+                        <a:t>5</a:t>
+                      </a:r>
+                    </a:p>
+                  </a:txBody>
+                  <a:tcPr/>
+                </a:tc>
+                <a:tc>
+                  <a:txBody>
+                    <a:bodyPr/>
+                    <a:lstStyle/>
+                    <a:p>
+                      <a:r>
+                        <a:rPr lang="ru-RU" sz="1800" b="0" i="0" kern="1200" dirty="0">
+                          <a:solidFill>
+                            <a:schemeClr val="dk1"/>
+                          </a:solidFill>
+                          <a:effectLst/>
+                          <a:latin typeface="+mn-lt"/>
+                          <a:ea typeface="+mn-ea"/>
+                          <a:cs typeface="+mn-cs"/>
+                        </a:rPr>
+                        <a:t>Лабораторные охватывают разные аспекты: документы, код, экспертизу</a:t>
+                      </a:r>
+                      <a:endParaRPr lang="ru-RU" dirty="0"/>
+                    </a:p>
+                  </a:txBody>
+                  <a:tcPr/>
+                </a:tc>
+                <a:extLst>
+                  <a:ext uri="{0D108BD9-81ED-4DB2-BD59-A6C34878D82A}">
+                    <a16:rowId xmlns:a16="http://schemas.microsoft.com/office/drawing/2014/main" val="1205489251"/>
+                  </a:ext>
+                </a:extLst>
+              </a:tr>
+              <a:tr h="370840">
+                <a:tc>
+                  <a:txBody>
+                    <a:bodyPr/>
+                    <a:lstStyle/>
+                    <a:p>
+                      <a:r>
+                        <a:rPr lang="ru-RU" sz="1800" b="0" i="0" kern="1200" dirty="0">
+                          <a:solidFill>
+                            <a:schemeClr val="dk1"/>
+                          </a:solidFill>
+                          <a:effectLst/>
+                          <a:latin typeface="+mn-lt"/>
+                          <a:ea typeface="+mn-ea"/>
+                          <a:cs typeface="+mn-cs"/>
+                        </a:rPr>
+                        <a:t>Значимость результатов</a:t>
+                      </a:r>
+                      <a:endParaRPr lang="ru-RU" dirty="0"/>
+                    </a:p>
+                  </a:txBody>
+                  <a:tcPr/>
+                </a:tc>
+                <a:tc>
+                  <a:txBody>
+                    <a:bodyPr/>
+                    <a:lstStyle/>
+                    <a:p>
+                      <a:r>
+                        <a:rPr lang="ru-RU" dirty="0"/>
+                        <a:t>4</a:t>
+                      </a:r>
+                    </a:p>
+                  </a:txBody>
+                  <a:tcPr/>
+                </a:tc>
+                <a:tc>
+                  <a:txBody>
+                    <a:bodyPr/>
+                    <a:lstStyle/>
+                    <a:p>
+                      <a:r>
+                        <a:rPr lang="ru-RU" sz="1800" b="0" i="0" kern="1200" dirty="0">
+                          <a:solidFill>
+                            <a:schemeClr val="dk1"/>
+                          </a:solidFill>
+                          <a:effectLst/>
+                          <a:latin typeface="+mn-lt"/>
+                          <a:ea typeface="+mn-ea"/>
+                          <a:cs typeface="+mn-cs"/>
+                        </a:rPr>
+                        <a:t>Результаты применимы в реальной практике</a:t>
+                      </a:r>
+                      <a:endParaRPr lang="ru-RU" dirty="0"/>
+                    </a:p>
+                  </a:txBody>
+                  <a:tcPr/>
+                </a:tc>
+                <a:extLst>
+                  <a:ext uri="{0D108BD9-81ED-4DB2-BD59-A6C34878D82A}">
+                    <a16:rowId xmlns:a16="http://schemas.microsoft.com/office/drawing/2014/main" val="3253799049"/>
+                  </a:ext>
+                </a:extLst>
+              </a:tr>
+            </a:tbl>
+          </a:graphicData>
+        </a:graphic>
+      </p:graphicFrame>
+    </p:spTree>
+    <p:extLst>
+      <p:ext uri="{BB962C8B-B14F-4D97-AF65-F5344CB8AC3E}">
+        <p14:creationId xmlns:p14="http://schemas.microsoft.com/office/powerpoint/2010/main" val="4089149626"/>
+      </p:ext>
+    </p:extLst>
+  </p:cSld>
+  <p:clrMapOvr>
+    <a:masterClrMapping/>
+  </p:clrMapOvr>
+</p:sld>
+</file>
+
+<file path=ppt/slides/slide8.xml><?xml version="1.0" encoding="utf-8"?>
+<p:sld xmlns:a="http://schemas.openxmlformats.org/drawingml/2006/main" xmlns:r="http://schemas.openxmlformats.org/officeDocument/2006/relationships" xmlns:p="http://schemas.openxmlformats.org/presentationml/2006/main">
+  <p:cSld>
+    <p:spTree>
+      <p:nvGrpSpPr>
+        <p:cNvPr id="1" name=""/>
+        <p:cNvGrpSpPr/>
+        <p:nvPr/>
+      </p:nvGrpSpPr>
+      <p:grpSpPr>
+        <a:xfrm>
+          <a:off x="0" y="0"/>
+          <a:ext cx="0" cy="0"/>
+          <a:chOff x="0" y="0"/>
+          <a:chExt cx="0" cy="0"/>
+        </a:xfrm>
+      </p:grpSpPr>
+      <p:sp>
+        <p:nvSpPr>
+          <p:cNvPr id="2" name="Заголовок 1">
+            <a:extLst>
+              <a:ext uri="{FF2B5EF4-FFF2-40B4-BE49-F238E27FC236}">
+                <a16:creationId xmlns:a16="http://schemas.microsoft.com/office/drawing/2014/main" id="{551B58B2-99DE-2CA9-43AF-8B99AD87DE1D}"/>
+              </a:ext>
+            </a:extLst>
+          </p:cNvPr>
+          <p:cNvSpPr>
+            <a:spLocks noGrp="1"/>
+          </p:cNvSpPr>
+          <p:nvPr>
+            <p:ph type="title"/>
+          </p:nvPr>
+        </p:nvSpPr>
+        <p:spPr/>
+        <p:txBody>
+          <a:bodyPr/>
+          <a:lstStyle/>
+          <a:p>
+            <a:r>
+              <a:rPr lang="en-US" b="1" dirty="0"/>
+              <a:t>SWOT-</a:t>
+            </a:r>
+            <a:r>
+              <a:rPr lang="ru-RU" b="1" dirty="0"/>
+              <a:t>анализ деятельности</a:t>
+            </a:r>
+            <a:br>
+              <a:rPr lang="ru-RU" b="1" dirty="0"/>
+            </a:br>
+            <a:endParaRPr lang="ru-RU" dirty="0"/>
+          </a:p>
+        </p:txBody>
+      </p:sp>
+      <p:sp>
+        <p:nvSpPr>
+          <p:cNvPr id="3" name="Текст 2">
+            <a:extLst>
+              <a:ext uri="{FF2B5EF4-FFF2-40B4-BE49-F238E27FC236}">
+                <a16:creationId xmlns:a16="http://schemas.microsoft.com/office/drawing/2014/main" id="{B79AFBE2-387C-46F3-AB9C-874A37695D9F}"/>
+              </a:ext>
+            </a:extLst>
+          </p:cNvPr>
+          <p:cNvSpPr>
+            <a:spLocks noGrp="1"/>
+          </p:cNvSpPr>
+          <p:nvPr>
+            <p:ph type="body" idx="1"/>
+          </p:nvPr>
+        </p:nvSpPr>
+        <p:spPr/>
+        <p:txBody>
+          <a:bodyPr/>
+          <a:lstStyle/>
+          <a:p>
+            <a:r>
+              <a:rPr lang="ru-RU" b="0" dirty="0"/>
+              <a:t>Сильные стороны (</a:t>
+            </a:r>
+            <a:r>
+              <a:rPr lang="en-US" b="0" dirty="0"/>
+              <a:t>Strengths)</a:t>
+            </a:r>
+            <a:endParaRPr lang="ru-RU" dirty="0"/>
+          </a:p>
+        </p:txBody>
+      </p:sp>
+      <p:sp>
+        <p:nvSpPr>
+          <p:cNvPr id="4" name="Объект 3">
+            <a:extLst>
+              <a:ext uri="{FF2B5EF4-FFF2-40B4-BE49-F238E27FC236}">
+                <a16:creationId xmlns:a16="http://schemas.microsoft.com/office/drawing/2014/main" id="{D995B8C7-FE74-1E9F-EDE8-FA9B2B9C7117}"/>
+              </a:ext>
+            </a:extLst>
+          </p:cNvPr>
+          <p:cNvSpPr>
+            <a:spLocks noGrp="1"/>
+          </p:cNvSpPr>
+          <p:nvPr>
+            <p:ph sz="half" idx="2"/>
+          </p:nvPr>
+        </p:nvSpPr>
+        <p:spPr/>
+        <p:txBody>
+          <a:bodyPr/>
+          <a:lstStyle/>
+          <a:p>
+            <a:r>
+              <a:rPr lang="ru-RU" dirty="0"/>
+              <a:t>Быстрое освоение инструментов</a:t>
+            </a:r>
+          </a:p>
+          <a:p>
+            <a:r>
+              <a:rPr lang="ru-RU" dirty="0"/>
+              <a:t>Знание стандартов</a:t>
+            </a:r>
+          </a:p>
+          <a:p>
+            <a:r>
+              <a:rPr lang="ru-RU" dirty="0"/>
+              <a:t>Умение работать с документацией</a:t>
+            </a:r>
+          </a:p>
+        </p:txBody>
+      </p:sp>
+      <p:sp>
+        <p:nvSpPr>
+          <p:cNvPr id="5" name="Текст 4">
+            <a:extLst>
+              <a:ext uri="{FF2B5EF4-FFF2-40B4-BE49-F238E27FC236}">
+                <a16:creationId xmlns:a16="http://schemas.microsoft.com/office/drawing/2014/main" id="{597F2A8B-3283-491C-ED82-2C538C791D4F}"/>
+              </a:ext>
+            </a:extLst>
+          </p:cNvPr>
+          <p:cNvSpPr>
+            <a:spLocks noGrp="1"/>
+          </p:cNvSpPr>
+          <p:nvPr>
+            <p:ph type="body" sz="quarter" idx="3"/>
+          </p:nvPr>
+        </p:nvSpPr>
+        <p:spPr/>
+        <p:txBody>
+          <a:bodyPr/>
+          <a:lstStyle/>
+          <a:p>
+            <a:r>
+              <a:rPr lang="ru-RU" b="0" dirty="0"/>
+              <a:t>Слабые стороны (</a:t>
+            </a:r>
+            <a:r>
+              <a:rPr lang="en-US" b="0" dirty="0"/>
+              <a:t>Weaknesses)</a:t>
+            </a:r>
+            <a:endParaRPr lang="ru-RU" dirty="0"/>
+          </a:p>
+        </p:txBody>
+      </p:sp>
+      <p:sp>
+        <p:nvSpPr>
+          <p:cNvPr id="6" name="Объект 5">
+            <a:extLst>
+              <a:ext uri="{FF2B5EF4-FFF2-40B4-BE49-F238E27FC236}">
+                <a16:creationId xmlns:a16="http://schemas.microsoft.com/office/drawing/2014/main" id="{DCAC107E-AA5C-C895-AD2D-57CCAC66F64D}"/>
+              </a:ext>
+            </a:extLst>
+          </p:cNvPr>
+          <p:cNvSpPr>
+            <a:spLocks noGrp="1"/>
+          </p:cNvSpPr>
+          <p:nvPr>
+            <p:ph sz="quarter" idx="4"/>
+          </p:nvPr>
+        </p:nvSpPr>
+        <p:spPr/>
+        <p:txBody>
+          <a:bodyPr/>
+          <a:lstStyle/>
+          <a:p>
+            <a:r>
+              <a:rPr lang="ru-RU" dirty="0"/>
+              <a:t>Прокрастинация</a:t>
+            </a:r>
+          </a:p>
+          <a:p>
+            <a:r>
+              <a:rPr lang="ru-RU" dirty="0"/>
+              <a:t>Средняя самоорганизация</a:t>
+            </a:r>
+          </a:p>
+          <a:p>
+            <a:r>
+              <a:rPr lang="ru-RU" dirty="0"/>
+              <a:t>Не всегда довожу до идеала</a:t>
+            </a:r>
+          </a:p>
+        </p:txBody>
+      </p:sp>
+    </p:spTree>
+    <p:extLst>
+      <p:ext uri="{BB962C8B-B14F-4D97-AF65-F5344CB8AC3E}">
+        <p14:creationId xmlns:p14="http://schemas.microsoft.com/office/powerpoint/2010/main" val="1474090769"/>
+      </p:ext>
+    </p:extLst>
+  </p:cSld>
+  <p:clrMapOvr>
+    <a:masterClrMapping/>
+  </p:clrMapOvr>
+</p:sld>
+</file>
+
+<file path=ppt/slides/slide9.xml><?xml version="1.0" encoding="utf-8"?>
+<p:sld xmlns:a="http://schemas.openxmlformats.org/drawingml/2006/main" xmlns:r="http://schemas.openxmlformats.org/officeDocument/2006/relationships" xmlns:p="http://schemas.openxmlformats.org/presentationml/2006/main">
+  <p:cSld>
+    <p:spTree>
+      <p:nvGrpSpPr>
+        <p:cNvPr id="1" name="">
+          <a:extLst>
+            <a:ext uri="{FF2B5EF4-FFF2-40B4-BE49-F238E27FC236}">
+              <a16:creationId xmlns:a16="http://schemas.microsoft.com/office/drawing/2014/main" id="{D3A8292F-D972-33F3-DFFE-DF44752DE5A9}"/>
+            </a:ext>
+          </a:extLst>
+        </p:cNvPr>
+        <p:cNvGrpSpPr/>
+        <p:nvPr/>
+      </p:nvGrpSpPr>
+      <p:grpSpPr>
+        <a:xfrm>
+          <a:off x="0" y="0"/>
+          <a:ext cx="0" cy="0"/>
+          <a:chOff x="0" y="0"/>
+          <a:chExt cx="0" cy="0"/>
+        </a:xfrm>
+      </p:grpSpPr>
+      <p:sp>
+        <p:nvSpPr>
+          <p:cNvPr id="2" name="Заголовок 1">
+            <a:extLst>
+              <a:ext uri="{FF2B5EF4-FFF2-40B4-BE49-F238E27FC236}">
+                <a16:creationId xmlns:a16="http://schemas.microsoft.com/office/drawing/2014/main" id="{D0A68DCE-EDE5-38A9-29A5-505E96C17D72}"/>
+              </a:ext>
+            </a:extLst>
+          </p:cNvPr>
+          <p:cNvSpPr>
+            <a:spLocks noGrp="1"/>
+          </p:cNvSpPr>
+          <p:nvPr>
+            <p:ph type="title"/>
+          </p:nvPr>
+        </p:nvSpPr>
+        <p:spPr/>
+        <p:txBody>
+          <a:bodyPr/>
+          <a:lstStyle/>
+          <a:p>
+            <a:r>
+              <a:rPr lang="en-US" b="1" dirty="0"/>
+              <a:t>SWOT-</a:t>
+            </a:r>
+            <a:r>
+              <a:rPr lang="ru-RU" b="1" dirty="0"/>
+              <a:t>анализ деятельности</a:t>
+            </a:r>
+            <a:br>
+              <a:rPr lang="ru-RU" b="1" dirty="0"/>
+            </a:br>
+            <a:endParaRPr lang="ru-RU" dirty="0"/>
+          </a:p>
+        </p:txBody>
+      </p:sp>
+      <p:sp>
+        <p:nvSpPr>
+          <p:cNvPr id="3" name="Текст 2">
+            <a:extLst>
+              <a:ext uri="{FF2B5EF4-FFF2-40B4-BE49-F238E27FC236}">
+                <a16:creationId xmlns:a16="http://schemas.microsoft.com/office/drawing/2014/main" id="{36B72E04-FC1D-377C-AB1C-B1EB4817F504}"/>
+              </a:ext>
+            </a:extLst>
+          </p:cNvPr>
+          <p:cNvSpPr>
+            <a:spLocks noGrp="1"/>
+          </p:cNvSpPr>
+          <p:nvPr>
+            <p:ph type="body" idx="1"/>
+          </p:nvPr>
+        </p:nvSpPr>
+        <p:spPr/>
+        <p:txBody>
+          <a:bodyPr/>
+          <a:lstStyle/>
+          <a:p>
+            <a:r>
+              <a:rPr lang="ru-RU" b="0" dirty="0"/>
+              <a:t>Возможности (</a:t>
+            </a:r>
+            <a:r>
+              <a:rPr lang="en-US" b="0" dirty="0"/>
+              <a:t>Opportunities)</a:t>
+            </a:r>
+            <a:endParaRPr lang="ru-RU" dirty="0"/>
+          </a:p>
+        </p:txBody>
+      </p:sp>
+      <p:sp>
+        <p:nvSpPr>
+          <p:cNvPr id="4" name="Объект 3">
+            <a:extLst>
+              <a:ext uri="{FF2B5EF4-FFF2-40B4-BE49-F238E27FC236}">
+                <a16:creationId xmlns:a16="http://schemas.microsoft.com/office/drawing/2014/main" id="{FE8BFC6C-78D8-0EB9-7D80-84622F0FEF98}"/>
+              </a:ext>
+            </a:extLst>
+          </p:cNvPr>
+          <p:cNvSpPr>
+            <a:spLocks noGrp="1"/>
+          </p:cNvSpPr>
+          <p:nvPr>
+            <p:ph sz="half" idx="2"/>
+          </p:nvPr>
+        </p:nvSpPr>
+        <p:spPr/>
+        <p:txBody>
+          <a:bodyPr/>
+          <a:lstStyle/>
+          <a:p>
+            <a:r>
+              <a:rPr lang="ru-RU" dirty="0"/>
+              <a:t>Стажировка в </a:t>
+            </a:r>
+            <a:r>
+              <a:rPr lang="en-US" dirty="0"/>
+              <a:t>IT-</a:t>
+            </a:r>
+            <a:r>
+              <a:rPr lang="ru-RU" dirty="0"/>
+              <a:t>компании</a:t>
+            </a:r>
+          </a:p>
+          <a:p>
+            <a:r>
+              <a:rPr lang="ru-RU" dirty="0"/>
+              <a:t>Участие в </a:t>
+            </a:r>
+            <a:r>
+              <a:rPr lang="en-US" dirty="0"/>
+              <a:t>open-source</a:t>
+            </a:r>
+            <a:endParaRPr lang="ru-RU" dirty="0"/>
+          </a:p>
+          <a:p>
+            <a:r>
+              <a:rPr lang="ru-RU" dirty="0"/>
+              <a:t>Изучение </a:t>
+            </a:r>
+            <a:r>
+              <a:rPr lang="en-US" dirty="0"/>
+              <a:t>DevOps</a:t>
+            </a:r>
+            <a:endParaRPr lang="ru-RU" dirty="0"/>
+          </a:p>
+        </p:txBody>
+      </p:sp>
+      <p:sp>
+        <p:nvSpPr>
+          <p:cNvPr id="5" name="Текст 4">
+            <a:extLst>
+              <a:ext uri="{FF2B5EF4-FFF2-40B4-BE49-F238E27FC236}">
+                <a16:creationId xmlns:a16="http://schemas.microsoft.com/office/drawing/2014/main" id="{D50D7FA4-02E2-82F1-BF4A-9481329F08F5}"/>
+              </a:ext>
+            </a:extLst>
+          </p:cNvPr>
+          <p:cNvSpPr>
+            <a:spLocks noGrp="1"/>
+          </p:cNvSpPr>
+          <p:nvPr>
+            <p:ph type="body" sz="quarter" idx="3"/>
+          </p:nvPr>
+        </p:nvSpPr>
+        <p:spPr/>
+        <p:txBody>
+          <a:bodyPr/>
+          <a:lstStyle/>
+          <a:p>
+            <a:r>
+              <a:rPr lang="ru-RU" b="0" dirty="0"/>
+              <a:t>Угрозы (</a:t>
+            </a:r>
+            <a:r>
+              <a:rPr lang="en-US" b="0" dirty="0"/>
+              <a:t>Threats)</a:t>
+            </a:r>
+            <a:endParaRPr lang="ru-RU" dirty="0"/>
+          </a:p>
+        </p:txBody>
+      </p:sp>
+      <p:sp>
+        <p:nvSpPr>
+          <p:cNvPr id="6" name="Объект 5">
+            <a:extLst>
+              <a:ext uri="{FF2B5EF4-FFF2-40B4-BE49-F238E27FC236}">
+                <a16:creationId xmlns:a16="http://schemas.microsoft.com/office/drawing/2014/main" id="{159969F2-3461-CA15-7743-DDCB4EC6BC1F}"/>
+              </a:ext>
+            </a:extLst>
+          </p:cNvPr>
+          <p:cNvSpPr>
+            <a:spLocks noGrp="1"/>
+          </p:cNvSpPr>
+          <p:nvPr>
+            <p:ph sz="quarter" idx="4"/>
+          </p:nvPr>
+        </p:nvSpPr>
+        <p:spPr/>
+        <p:txBody>
+          <a:bodyPr/>
+          <a:lstStyle/>
+          <a:p>
+            <a:r>
+              <a:rPr lang="ru-RU" dirty="0"/>
+              <a:t>Высокая конкуренция</a:t>
+            </a:r>
+          </a:p>
+          <a:p>
+            <a:r>
+              <a:rPr lang="ru-RU" dirty="0"/>
+              <a:t>Нехватка времени из-за других предметов</a:t>
+            </a:r>
+          </a:p>
+          <a:p>
+            <a:r>
+              <a:rPr lang="ru-RU" dirty="0"/>
+              <a:t>Быстрое устаревание технологий</a:t>
+            </a:r>
+          </a:p>
+        </p:txBody>
+      </p:sp>
+    </p:spTree>
+    <p:extLst>
+      <p:ext uri="{BB962C8B-B14F-4D97-AF65-F5344CB8AC3E}">
+        <p14:creationId xmlns:p14="http://schemas.microsoft.com/office/powerpoint/2010/main" val="781617177"/>
       </p:ext>
     </p:extLst>
   </p:cSld>
